--- a/Game/Objects/그림판.pptx
+++ b/Game/Objects/그림판.pptx
@@ -2,12 +2,13 @@
 <file path=ppt/presentation.xml><?xml version="1.0" encoding="utf-8"?>
 <p:presentation xmlns:a="http://schemas.openxmlformats.org/drawingml/2006/main" xmlns:r="http://schemas.openxmlformats.org/officeDocument/2006/relationships" xmlns:p="http://schemas.openxmlformats.org/presentationml/2006/main" saveSubsetFonts="1">
   <p:sldMasterIdLst>
-    <p:sldMasterId id="2147483660" r:id="rId1"/>
+    <p:sldMasterId id="2147483672" r:id="rId1"/>
   </p:sldMasterIdLst>
   <p:sldIdLst>
     <p:sldId id="256" r:id="rId2"/>
+    <p:sldId id="257" r:id="rId3"/>
   </p:sldIdLst>
-  <p:sldSz cx="12192000" cy="6858000"/>
+  <p:sldSz cx="18288000" cy="10287000"/>
   <p:notesSz cx="6858000" cy="9144000"/>
   <p:defaultTextStyle>
     <a:defPPr>
@@ -104,6 +105,11 @@
       </a:defRPr>
     </a:lvl9pPr>
   </p:defaultTextStyle>
+  <p:extLst>
+    <p:ext uri="{EFAFB233-063F-42B5-8137-9DF3F51BA10A}">
+      <p15:sldGuideLst xmlns:p15="http://schemas.microsoft.com/office/powerpoint/2012/main"/>
+    </p:ext>
+  </p:extLst>
 </p:presentation>
 </file>
 
@@ -136,15 +142,15 @@
         </p:nvSpPr>
         <p:spPr>
           <a:xfrm>
-            <a:off x="1524000" y="1122363"/>
-            <a:ext cx="9144000" cy="2387600"/>
+            <a:off x="2286000" y="1683545"/>
+            <a:ext cx="13716000" cy="3581400"/>
           </a:xfrm>
         </p:spPr>
         <p:txBody>
           <a:bodyPr anchor="b"/>
           <a:lstStyle>
             <a:lvl1pPr algn="ctr">
-              <a:defRPr sz="6000"/>
+              <a:defRPr sz="9000"/>
             </a:lvl1pPr>
           </a:lstStyle>
           <a:p>
@@ -168,8 +174,8 @@
         </p:nvSpPr>
         <p:spPr>
           <a:xfrm>
-            <a:off x="1524000" y="3602038"/>
-            <a:ext cx="9144000" cy="1655762"/>
+            <a:off x="2286000" y="5403057"/>
+            <a:ext cx="13716000" cy="2483643"/>
           </a:xfrm>
         </p:spPr>
         <p:txBody>
@@ -177,39 +183,39 @@
           <a:lstStyle>
             <a:lvl1pPr marL="0" indent="0" algn="ctr">
               <a:buNone/>
+              <a:defRPr sz="3600"/>
+            </a:lvl1pPr>
+            <a:lvl2pPr marL="685800" indent="0" algn="ctr">
+              <a:buNone/>
+              <a:defRPr sz="3000"/>
+            </a:lvl2pPr>
+            <a:lvl3pPr marL="1371600" indent="0" algn="ctr">
+              <a:buNone/>
+              <a:defRPr sz="2700"/>
+            </a:lvl3pPr>
+            <a:lvl4pPr marL="2057400" indent="0" algn="ctr">
+              <a:buNone/>
               <a:defRPr sz="2400"/>
-            </a:lvl1pPr>
-            <a:lvl2pPr marL="457200" indent="0" algn="ctr">
-              <a:buNone/>
-              <a:defRPr sz="2000"/>
-            </a:lvl2pPr>
-            <a:lvl3pPr marL="914400" indent="0" algn="ctr">
-              <a:buNone/>
-              <a:defRPr sz="1800"/>
-            </a:lvl3pPr>
-            <a:lvl4pPr marL="1371600" indent="0" algn="ctr">
-              <a:buNone/>
-              <a:defRPr sz="1600"/>
             </a:lvl4pPr>
-            <a:lvl5pPr marL="1828800" indent="0" algn="ctr">
-              <a:buNone/>
-              <a:defRPr sz="1600"/>
+            <a:lvl5pPr marL="2743200" indent="0" algn="ctr">
+              <a:buNone/>
+              <a:defRPr sz="2400"/>
             </a:lvl5pPr>
-            <a:lvl6pPr marL="2286000" indent="0" algn="ctr">
-              <a:buNone/>
-              <a:defRPr sz="1600"/>
+            <a:lvl6pPr marL="3429000" indent="0" algn="ctr">
+              <a:buNone/>
+              <a:defRPr sz="2400"/>
             </a:lvl6pPr>
-            <a:lvl7pPr marL="2743200" indent="0" algn="ctr">
-              <a:buNone/>
-              <a:defRPr sz="1600"/>
+            <a:lvl7pPr marL="4114800" indent="0" algn="ctr">
+              <a:buNone/>
+              <a:defRPr sz="2400"/>
             </a:lvl7pPr>
-            <a:lvl8pPr marL="3200400" indent="0" algn="ctr">
-              <a:buNone/>
-              <a:defRPr sz="1600"/>
+            <a:lvl8pPr marL="4800600" indent="0" algn="ctr">
+              <a:buNone/>
+              <a:defRPr sz="2400"/>
             </a:lvl8pPr>
-            <a:lvl9pPr marL="3657600" indent="0" algn="ctr">
-              <a:buNone/>
-              <a:defRPr sz="1600"/>
+            <a:lvl9pPr marL="5486400" indent="0" algn="ctr">
+              <a:buNone/>
+              <a:defRPr sz="2400"/>
             </a:lvl9pPr>
           </a:lstStyle>
           <a:p>
@@ -238,7 +244,7 @@
           <a:p>
             <a:fld id="{94AEC798-097D-4CC0-8FC4-AE38FC7ECE7F}" type="datetimeFigureOut">
               <a:rPr lang="ko-KR" altLang="en-US" smtClean="0"/>
-              <a:t>2026-07-09</a:t>
+              <a:t>2026-08-19</a:t>
             </a:fld>
             <a:endParaRPr lang="ko-KR" altLang="en-US"/>
           </a:p>
@@ -289,7 +295,7 @@
     </p:spTree>
     <p:extLst>
       <p:ext uri="{BB962C8B-B14F-4D97-AF65-F5344CB8AC3E}">
-        <p14:creationId xmlns:p14="http://schemas.microsoft.com/office/powerpoint/2010/main" val="4166135968"/>
+        <p14:creationId xmlns:p14="http://schemas.microsoft.com/office/powerpoint/2010/main" val="1937562302"/>
       </p:ext>
     </p:extLst>
   </p:cSld>
@@ -408,7 +414,7 @@
           <a:p>
             <a:fld id="{94AEC798-097D-4CC0-8FC4-AE38FC7ECE7F}" type="datetimeFigureOut">
               <a:rPr lang="ko-KR" altLang="en-US" smtClean="0"/>
-              <a:t>2026-07-09</a:t>
+              <a:t>2026-08-19</a:t>
             </a:fld>
             <a:endParaRPr lang="ko-KR" altLang="en-US"/>
           </a:p>
@@ -459,7 +465,7 @@
     </p:spTree>
     <p:extLst>
       <p:ext uri="{BB962C8B-B14F-4D97-AF65-F5344CB8AC3E}">
-        <p14:creationId xmlns:p14="http://schemas.microsoft.com/office/powerpoint/2010/main" val="1712009068"/>
+        <p14:creationId xmlns:p14="http://schemas.microsoft.com/office/powerpoint/2010/main" val="2135196534"/>
       </p:ext>
     </p:extLst>
   </p:cSld>
@@ -498,8 +504,8 @@
         </p:nvSpPr>
         <p:spPr>
           <a:xfrm>
-            <a:off x="8724900" y="365125"/>
-            <a:ext cx="2628900" cy="5811838"/>
+            <a:off x="13087350" y="547688"/>
+            <a:ext cx="3943350" cy="8717757"/>
           </a:xfrm>
         </p:spPr>
         <p:txBody>
@@ -526,8 +532,8 @@
         </p:nvSpPr>
         <p:spPr>
           <a:xfrm>
-            <a:off x="838200" y="365125"/>
-            <a:ext cx="7734300" cy="5811838"/>
+            <a:off x="1257300" y="547688"/>
+            <a:ext cx="11601450" cy="8717757"/>
           </a:xfrm>
         </p:spPr>
         <p:txBody>
@@ -588,7 +594,7 @@
           <a:p>
             <a:fld id="{94AEC798-097D-4CC0-8FC4-AE38FC7ECE7F}" type="datetimeFigureOut">
               <a:rPr lang="ko-KR" altLang="en-US" smtClean="0"/>
-              <a:t>2026-07-09</a:t>
+              <a:t>2026-08-19</a:t>
             </a:fld>
             <a:endParaRPr lang="ko-KR" altLang="en-US"/>
           </a:p>
@@ -639,7 +645,7 @@
     </p:spTree>
     <p:extLst>
       <p:ext uri="{BB962C8B-B14F-4D97-AF65-F5344CB8AC3E}">
-        <p14:creationId xmlns:p14="http://schemas.microsoft.com/office/powerpoint/2010/main" val="3217695036"/>
+        <p14:creationId xmlns:p14="http://schemas.microsoft.com/office/powerpoint/2010/main" val="3929882620"/>
       </p:ext>
     </p:extLst>
   </p:cSld>
@@ -758,7 +764,7 @@
           <a:p>
             <a:fld id="{94AEC798-097D-4CC0-8FC4-AE38FC7ECE7F}" type="datetimeFigureOut">
               <a:rPr lang="ko-KR" altLang="en-US" smtClean="0"/>
-              <a:t>2026-07-09</a:t>
+              <a:t>2026-08-19</a:t>
             </a:fld>
             <a:endParaRPr lang="ko-KR" altLang="en-US"/>
           </a:p>
@@ -809,7 +815,7 @@
     </p:spTree>
     <p:extLst>
       <p:ext uri="{BB962C8B-B14F-4D97-AF65-F5344CB8AC3E}">
-        <p14:creationId xmlns:p14="http://schemas.microsoft.com/office/powerpoint/2010/main" val="378500176"/>
+        <p14:creationId xmlns:p14="http://schemas.microsoft.com/office/powerpoint/2010/main" val="3968842207"/>
       </p:ext>
     </p:extLst>
   </p:cSld>
@@ -848,15 +854,15 @@
         </p:nvSpPr>
         <p:spPr>
           <a:xfrm>
-            <a:off x="831850" y="1709738"/>
-            <a:ext cx="10515600" cy="2852737"/>
+            <a:off x="1247775" y="2564608"/>
+            <a:ext cx="15773400" cy="4279106"/>
           </a:xfrm>
         </p:spPr>
         <p:txBody>
           <a:bodyPr anchor="b"/>
           <a:lstStyle>
             <a:lvl1pPr>
-              <a:defRPr sz="6000"/>
+              <a:defRPr sz="9000"/>
             </a:lvl1pPr>
           </a:lstStyle>
           <a:p>
@@ -880,14 +886,44 @@
         </p:nvSpPr>
         <p:spPr>
           <a:xfrm>
-            <a:off x="831850" y="4589463"/>
-            <a:ext cx="10515600" cy="1500187"/>
+            <a:off x="1247775" y="6884195"/>
+            <a:ext cx="15773400" cy="2250281"/>
           </a:xfrm>
         </p:spPr>
         <p:txBody>
           <a:bodyPr/>
           <a:lstStyle>
             <a:lvl1pPr marL="0" indent="0">
+              <a:buNone/>
+              <a:defRPr sz="3600">
+                <a:solidFill>
+                  <a:schemeClr val="tx1">
+                    <a:tint val="75000"/>
+                  </a:schemeClr>
+                </a:solidFill>
+              </a:defRPr>
+            </a:lvl1pPr>
+            <a:lvl2pPr marL="685800" indent="0">
+              <a:buNone/>
+              <a:defRPr sz="3000">
+                <a:solidFill>
+                  <a:schemeClr val="tx1">
+                    <a:tint val="75000"/>
+                  </a:schemeClr>
+                </a:solidFill>
+              </a:defRPr>
+            </a:lvl2pPr>
+            <a:lvl3pPr marL="1371600" indent="0">
+              <a:buNone/>
+              <a:defRPr sz="2700">
+                <a:solidFill>
+                  <a:schemeClr val="tx1">
+                    <a:tint val="75000"/>
+                  </a:schemeClr>
+                </a:solidFill>
+              </a:defRPr>
+            </a:lvl3pPr>
+            <a:lvl4pPr marL="2057400" indent="0">
               <a:buNone/>
               <a:defRPr sz="2400">
                 <a:solidFill>
@@ -896,40 +932,10 @@
                   </a:schemeClr>
                 </a:solidFill>
               </a:defRPr>
-            </a:lvl1pPr>
-            <a:lvl2pPr marL="457200" indent="0">
-              <a:buNone/>
-              <a:defRPr sz="2000">
-                <a:solidFill>
-                  <a:schemeClr val="tx1">
-                    <a:tint val="75000"/>
-                  </a:schemeClr>
-                </a:solidFill>
-              </a:defRPr>
-            </a:lvl2pPr>
-            <a:lvl3pPr marL="914400" indent="0">
-              <a:buNone/>
-              <a:defRPr sz="1800">
-                <a:solidFill>
-                  <a:schemeClr val="tx1">
-                    <a:tint val="75000"/>
-                  </a:schemeClr>
-                </a:solidFill>
-              </a:defRPr>
-            </a:lvl3pPr>
-            <a:lvl4pPr marL="1371600" indent="0">
-              <a:buNone/>
-              <a:defRPr sz="1600">
-                <a:solidFill>
-                  <a:schemeClr val="tx1">
-                    <a:tint val="75000"/>
-                  </a:schemeClr>
-                </a:solidFill>
-              </a:defRPr>
             </a:lvl4pPr>
-            <a:lvl5pPr marL="1828800" indent="0">
-              <a:buNone/>
-              <a:defRPr sz="1600">
+            <a:lvl5pPr marL="2743200" indent="0">
+              <a:buNone/>
+              <a:defRPr sz="2400">
                 <a:solidFill>
                   <a:schemeClr val="tx1">
                     <a:tint val="75000"/>
@@ -937,9 +943,9 @@
                 </a:solidFill>
               </a:defRPr>
             </a:lvl5pPr>
-            <a:lvl6pPr marL="2286000" indent="0">
-              <a:buNone/>
-              <a:defRPr sz="1600">
+            <a:lvl6pPr marL="3429000" indent="0">
+              <a:buNone/>
+              <a:defRPr sz="2400">
                 <a:solidFill>
                   <a:schemeClr val="tx1">
                     <a:tint val="75000"/>
@@ -947,9 +953,9 @@
                 </a:solidFill>
               </a:defRPr>
             </a:lvl6pPr>
-            <a:lvl7pPr marL="2743200" indent="0">
-              <a:buNone/>
-              <a:defRPr sz="1600">
+            <a:lvl7pPr marL="4114800" indent="0">
+              <a:buNone/>
+              <a:defRPr sz="2400">
                 <a:solidFill>
                   <a:schemeClr val="tx1">
                     <a:tint val="75000"/>
@@ -957,9 +963,9 @@
                 </a:solidFill>
               </a:defRPr>
             </a:lvl7pPr>
-            <a:lvl8pPr marL="3200400" indent="0">
-              <a:buNone/>
-              <a:defRPr sz="1600">
+            <a:lvl8pPr marL="4800600" indent="0">
+              <a:buNone/>
+              <a:defRPr sz="2400">
                 <a:solidFill>
                   <a:schemeClr val="tx1">
                     <a:tint val="75000"/>
@@ -967,9 +973,9 @@
                 </a:solidFill>
               </a:defRPr>
             </a:lvl8pPr>
-            <a:lvl9pPr marL="3657600" indent="0">
-              <a:buNone/>
-              <a:defRPr sz="1600">
+            <a:lvl9pPr marL="5486400" indent="0">
+              <a:buNone/>
+              <a:defRPr sz="2400">
                 <a:solidFill>
                   <a:schemeClr val="tx1">
                     <a:tint val="75000"/>
@@ -1004,7 +1010,7 @@
           <a:p>
             <a:fld id="{94AEC798-097D-4CC0-8FC4-AE38FC7ECE7F}" type="datetimeFigureOut">
               <a:rPr lang="ko-KR" altLang="en-US" smtClean="0"/>
-              <a:t>2026-07-09</a:t>
+              <a:t>2026-08-19</a:t>
             </a:fld>
             <a:endParaRPr lang="ko-KR" altLang="en-US"/>
           </a:p>
@@ -1055,7 +1061,7 @@
     </p:spTree>
     <p:extLst>
       <p:ext uri="{BB962C8B-B14F-4D97-AF65-F5344CB8AC3E}">
-        <p14:creationId xmlns:p14="http://schemas.microsoft.com/office/powerpoint/2010/main" val="2927453291"/>
+        <p14:creationId xmlns:p14="http://schemas.microsoft.com/office/powerpoint/2010/main" val="3136438149"/>
       </p:ext>
     </p:extLst>
   </p:cSld>
@@ -1117,8 +1123,8 @@
         </p:nvSpPr>
         <p:spPr>
           <a:xfrm>
-            <a:off x="838200" y="1825625"/>
-            <a:ext cx="5181600" cy="4351338"/>
+            <a:off x="1257300" y="2738438"/>
+            <a:ext cx="7772400" cy="6527007"/>
           </a:xfrm>
         </p:spPr>
         <p:txBody>
@@ -1174,8 +1180,8 @@
         </p:nvSpPr>
         <p:spPr>
           <a:xfrm>
-            <a:off x="6172200" y="1825625"/>
-            <a:ext cx="5181600" cy="4351338"/>
+            <a:off x="9258300" y="2738438"/>
+            <a:ext cx="7772400" cy="6527007"/>
           </a:xfrm>
         </p:spPr>
         <p:txBody>
@@ -1236,7 +1242,7 @@
           <a:p>
             <a:fld id="{94AEC798-097D-4CC0-8FC4-AE38FC7ECE7F}" type="datetimeFigureOut">
               <a:rPr lang="ko-KR" altLang="en-US" smtClean="0"/>
-              <a:t>2026-07-09</a:t>
+              <a:t>2026-08-19</a:t>
             </a:fld>
             <a:endParaRPr lang="ko-KR" altLang="en-US"/>
           </a:p>
@@ -1287,7 +1293,7 @@
     </p:spTree>
     <p:extLst>
       <p:ext uri="{BB962C8B-B14F-4D97-AF65-F5344CB8AC3E}">
-        <p14:creationId xmlns:p14="http://schemas.microsoft.com/office/powerpoint/2010/main" val="2897515733"/>
+        <p14:creationId xmlns:p14="http://schemas.microsoft.com/office/powerpoint/2010/main" val="4039938059"/>
       </p:ext>
     </p:extLst>
   </p:cSld>
@@ -1326,8 +1332,8 @@
         </p:nvSpPr>
         <p:spPr>
           <a:xfrm>
-            <a:off x="839788" y="365125"/>
-            <a:ext cx="10515600" cy="1325563"/>
+            <a:off x="1259682" y="547688"/>
+            <a:ext cx="15773400" cy="1988345"/>
           </a:xfrm>
         </p:spPr>
         <p:txBody>
@@ -1354,8 +1360,8 @@
         </p:nvSpPr>
         <p:spPr>
           <a:xfrm>
-            <a:off x="839788" y="1681163"/>
-            <a:ext cx="5157787" cy="823912"/>
+            <a:off x="1259683" y="2521745"/>
+            <a:ext cx="7736681" cy="1235868"/>
           </a:xfrm>
         </p:spPr>
         <p:txBody>
@@ -1363,39 +1369,39 @@
           <a:lstStyle>
             <a:lvl1pPr marL="0" indent="0">
               <a:buNone/>
+              <a:defRPr sz="3600" b="1"/>
+            </a:lvl1pPr>
+            <a:lvl2pPr marL="685800" indent="0">
+              <a:buNone/>
+              <a:defRPr sz="3000" b="1"/>
+            </a:lvl2pPr>
+            <a:lvl3pPr marL="1371600" indent="0">
+              <a:buNone/>
+              <a:defRPr sz="2700" b="1"/>
+            </a:lvl3pPr>
+            <a:lvl4pPr marL="2057400" indent="0">
+              <a:buNone/>
               <a:defRPr sz="2400" b="1"/>
-            </a:lvl1pPr>
-            <a:lvl2pPr marL="457200" indent="0">
-              <a:buNone/>
-              <a:defRPr sz="2000" b="1"/>
-            </a:lvl2pPr>
-            <a:lvl3pPr marL="914400" indent="0">
-              <a:buNone/>
-              <a:defRPr sz="1800" b="1"/>
-            </a:lvl3pPr>
-            <a:lvl4pPr marL="1371600" indent="0">
-              <a:buNone/>
-              <a:defRPr sz="1600" b="1"/>
             </a:lvl4pPr>
-            <a:lvl5pPr marL="1828800" indent="0">
-              <a:buNone/>
-              <a:defRPr sz="1600" b="1"/>
+            <a:lvl5pPr marL="2743200" indent="0">
+              <a:buNone/>
+              <a:defRPr sz="2400" b="1"/>
             </a:lvl5pPr>
-            <a:lvl6pPr marL="2286000" indent="0">
-              <a:buNone/>
-              <a:defRPr sz="1600" b="1"/>
+            <a:lvl6pPr marL="3429000" indent="0">
+              <a:buNone/>
+              <a:defRPr sz="2400" b="1"/>
             </a:lvl6pPr>
-            <a:lvl7pPr marL="2743200" indent="0">
-              <a:buNone/>
-              <a:defRPr sz="1600" b="1"/>
+            <a:lvl7pPr marL="4114800" indent="0">
+              <a:buNone/>
+              <a:defRPr sz="2400" b="1"/>
             </a:lvl7pPr>
-            <a:lvl8pPr marL="3200400" indent="0">
-              <a:buNone/>
-              <a:defRPr sz="1600" b="1"/>
+            <a:lvl8pPr marL="4800600" indent="0">
+              <a:buNone/>
+              <a:defRPr sz="2400" b="1"/>
             </a:lvl8pPr>
-            <a:lvl9pPr marL="3657600" indent="0">
-              <a:buNone/>
-              <a:defRPr sz="1600" b="1"/>
+            <a:lvl9pPr marL="5486400" indent="0">
+              <a:buNone/>
+              <a:defRPr sz="2400" b="1"/>
             </a:lvl9pPr>
           </a:lstStyle>
           <a:p>
@@ -1419,8 +1425,8 @@
         </p:nvSpPr>
         <p:spPr>
           <a:xfrm>
-            <a:off x="839788" y="2505075"/>
-            <a:ext cx="5157787" cy="3684588"/>
+            <a:off x="1259683" y="3757613"/>
+            <a:ext cx="7736681" cy="5526882"/>
           </a:xfrm>
         </p:spPr>
         <p:txBody>
@@ -1476,8 +1482,8 @@
         </p:nvSpPr>
         <p:spPr>
           <a:xfrm>
-            <a:off x="6172200" y="1681163"/>
-            <a:ext cx="5183188" cy="823912"/>
+            <a:off x="9258300" y="2521745"/>
+            <a:ext cx="7774782" cy="1235868"/>
           </a:xfrm>
         </p:spPr>
         <p:txBody>
@@ -1485,39 +1491,39 @@
           <a:lstStyle>
             <a:lvl1pPr marL="0" indent="0">
               <a:buNone/>
+              <a:defRPr sz="3600" b="1"/>
+            </a:lvl1pPr>
+            <a:lvl2pPr marL="685800" indent="0">
+              <a:buNone/>
+              <a:defRPr sz="3000" b="1"/>
+            </a:lvl2pPr>
+            <a:lvl3pPr marL="1371600" indent="0">
+              <a:buNone/>
+              <a:defRPr sz="2700" b="1"/>
+            </a:lvl3pPr>
+            <a:lvl4pPr marL="2057400" indent="0">
+              <a:buNone/>
               <a:defRPr sz="2400" b="1"/>
-            </a:lvl1pPr>
-            <a:lvl2pPr marL="457200" indent="0">
-              <a:buNone/>
-              <a:defRPr sz="2000" b="1"/>
-            </a:lvl2pPr>
-            <a:lvl3pPr marL="914400" indent="0">
-              <a:buNone/>
-              <a:defRPr sz="1800" b="1"/>
-            </a:lvl3pPr>
-            <a:lvl4pPr marL="1371600" indent="0">
-              <a:buNone/>
-              <a:defRPr sz="1600" b="1"/>
             </a:lvl4pPr>
-            <a:lvl5pPr marL="1828800" indent="0">
-              <a:buNone/>
-              <a:defRPr sz="1600" b="1"/>
+            <a:lvl5pPr marL="2743200" indent="0">
+              <a:buNone/>
+              <a:defRPr sz="2400" b="1"/>
             </a:lvl5pPr>
-            <a:lvl6pPr marL="2286000" indent="0">
-              <a:buNone/>
-              <a:defRPr sz="1600" b="1"/>
+            <a:lvl6pPr marL="3429000" indent="0">
+              <a:buNone/>
+              <a:defRPr sz="2400" b="1"/>
             </a:lvl6pPr>
-            <a:lvl7pPr marL="2743200" indent="0">
-              <a:buNone/>
-              <a:defRPr sz="1600" b="1"/>
+            <a:lvl7pPr marL="4114800" indent="0">
+              <a:buNone/>
+              <a:defRPr sz="2400" b="1"/>
             </a:lvl7pPr>
-            <a:lvl8pPr marL="3200400" indent="0">
-              <a:buNone/>
-              <a:defRPr sz="1600" b="1"/>
+            <a:lvl8pPr marL="4800600" indent="0">
+              <a:buNone/>
+              <a:defRPr sz="2400" b="1"/>
             </a:lvl8pPr>
-            <a:lvl9pPr marL="3657600" indent="0">
-              <a:buNone/>
-              <a:defRPr sz="1600" b="1"/>
+            <a:lvl9pPr marL="5486400" indent="0">
+              <a:buNone/>
+              <a:defRPr sz="2400" b="1"/>
             </a:lvl9pPr>
           </a:lstStyle>
           <a:p>
@@ -1541,8 +1547,8 @@
         </p:nvSpPr>
         <p:spPr>
           <a:xfrm>
-            <a:off x="6172200" y="2505075"/>
-            <a:ext cx="5183188" cy="3684588"/>
+            <a:off x="9258300" y="3757613"/>
+            <a:ext cx="7774782" cy="5526882"/>
           </a:xfrm>
         </p:spPr>
         <p:txBody>
@@ -1603,7 +1609,7 @@
           <a:p>
             <a:fld id="{94AEC798-097D-4CC0-8FC4-AE38FC7ECE7F}" type="datetimeFigureOut">
               <a:rPr lang="ko-KR" altLang="en-US" smtClean="0"/>
-              <a:t>2026-07-09</a:t>
+              <a:t>2026-08-19</a:t>
             </a:fld>
             <a:endParaRPr lang="ko-KR" altLang="en-US"/>
           </a:p>
@@ -1654,7 +1660,7 @@
     </p:spTree>
     <p:extLst>
       <p:ext uri="{BB962C8B-B14F-4D97-AF65-F5344CB8AC3E}">
-        <p14:creationId xmlns:p14="http://schemas.microsoft.com/office/powerpoint/2010/main" val="2678774761"/>
+        <p14:creationId xmlns:p14="http://schemas.microsoft.com/office/powerpoint/2010/main" val="1743561407"/>
       </p:ext>
     </p:extLst>
   </p:cSld>
@@ -1721,7 +1727,7 @@
           <a:p>
             <a:fld id="{94AEC798-097D-4CC0-8FC4-AE38FC7ECE7F}" type="datetimeFigureOut">
               <a:rPr lang="ko-KR" altLang="en-US" smtClean="0"/>
-              <a:t>2026-07-09</a:t>
+              <a:t>2026-08-19</a:t>
             </a:fld>
             <a:endParaRPr lang="ko-KR" altLang="en-US"/>
           </a:p>
@@ -1772,7 +1778,7 @@
     </p:spTree>
     <p:extLst>
       <p:ext uri="{BB962C8B-B14F-4D97-AF65-F5344CB8AC3E}">
-        <p14:creationId xmlns:p14="http://schemas.microsoft.com/office/powerpoint/2010/main" val="3029006296"/>
+        <p14:creationId xmlns:p14="http://schemas.microsoft.com/office/powerpoint/2010/main" val="2969019543"/>
       </p:ext>
     </p:extLst>
   </p:cSld>
@@ -1816,7 +1822,7 @@
           <a:p>
             <a:fld id="{94AEC798-097D-4CC0-8FC4-AE38FC7ECE7F}" type="datetimeFigureOut">
               <a:rPr lang="ko-KR" altLang="en-US" smtClean="0"/>
-              <a:t>2026-07-09</a:t>
+              <a:t>2026-08-19</a:t>
             </a:fld>
             <a:endParaRPr lang="ko-KR" altLang="en-US"/>
           </a:p>
@@ -1867,7 +1873,7 @@
     </p:spTree>
     <p:extLst>
       <p:ext uri="{BB962C8B-B14F-4D97-AF65-F5344CB8AC3E}">
-        <p14:creationId xmlns:p14="http://schemas.microsoft.com/office/powerpoint/2010/main" val="1581469248"/>
+        <p14:creationId xmlns:p14="http://schemas.microsoft.com/office/powerpoint/2010/main" val="2141115399"/>
       </p:ext>
     </p:extLst>
   </p:cSld>
@@ -1906,15 +1912,15 @@
         </p:nvSpPr>
         <p:spPr>
           <a:xfrm>
-            <a:off x="839788" y="457200"/>
-            <a:ext cx="3932237" cy="1600200"/>
+            <a:off x="1259683" y="685800"/>
+            <a:ext cx="5898356" cy="2400300"/>
           </a:xfrm>
         </p:spPr>
         <p:txBody>
           <a:bodyPr anchor="b"/>
           <a:lstStyle>
             <a:lvl1pPr>
-              <a:defRPr sz="3200"/>
+              <a:defRPr sz="4800"/>
             </a:lvl1pPr>
           </a:lstStyle>
           <a:p>
@@ -1938,39 +1944,39 @@
         </p:nvSpPr>
         <p:spPr>
           <a:xfrm>
-            <a:off x="5183188" y="987425"/>
-            <a:ext cx="6172200" cy="4873625"/>
+            <a:off x="7774782" y="1481138"/>
+            <a:ext cx="9258300" cy="7310438"/>
           </a:xfrm>
         </p:spPr>
         <p:txBody>
           <a:bodyPr/>
           <a:lstStyle>
             <a:lvl1pPr>
-              <a:defRPr sz="3200"/>
+              <a:defRPr sz="4800"/>
             </a:lvl1pPr>
             <a:lvl2pPr>
-              <a:defRPr sz="2800"/>
+              <a:defRPr sz="4200"/>
             </a:lvl2pPr>
             <a:lvl3pPr>
-              <a:defRPr sz="2400"/>
+              <a:defRPr sz="3600"/>
             </a:lvl3pPr>
             <a:lvl4pPr>
-              <a:defRPr sz="2000"/>
+              <a:defRPr sz="3000"/>
             </a:lvl4pPr>
             <a:lvl5pPr>
-              <a:defRPr sz="2000"/>
+              <a:defRPr sz="3000"/>
             </a:lvl5pPr>
             <a:lvl6pPr>
-              <a:defRPr sz="2000"/>
+              <a:defRPr sz="3000"/>
             </a:lvl6pPr>
             <a:lvl7pPr>
-              <a:defRPr sz="2000"/>
+              <a:defRPr sz="3000"/>
             </a:lvl7pPr>
             <a:lvl8pPr>
-              <a:defRPr sz="2000"/>
+              <a:defRPr sz="3000"/>
             </a:lvl8pPr>
             <a:lvl9pPr>
-              <a:defRPr sz="2000"/>
+              <a:defRPr sz="3000"/>
             </a:lvl9pPr>
           </a:lstStyle>
           <a:p>
@@ -2023,8 +2029,8 @@
         </p:nvSpPr>
         <p:spPr>
           <a:xfrm>
-            <a:off x="839788" y="2057400"/>
-            <a:ext cx="3932237" cy="3811588"/>
+            <a:off x="1259683" y="3086100"/>
+            <a:ext cx="5898356" cy="5717382"/>
           </a:xfrm>
         </p:spPr>
         <p:txBody>
@@ -2032,39 +2038,39 @@
           <a:lstStyle>
             <a:lvl1pPr marL="0" indent="0">
               <a:buNone/>
-              <a:defRPr sz="1600"/>
+              <a:defRPr sz="2400"/>
             </a:lvl1pPr>
-            <a:lvl2pPr marL="457200" indent="0">
-              <a:buNone/>
-              <a:defRPr sz="1400"/>
+            <a:lvl2pPr marL="685800" indent="0">
+              <a:buNone/>
+              <a:defRPr sz="2100"/>
             </a:lvl2pPr>
-            <a:lvl3pPr marL="914400" indent="0">
-              <a:buNone/>
-              <a:defRPr sz="1200"/>
+            <a:lvl3pPr marL="1371600" indent="0">
+              <a:buNone/>
+              <a:defRPr sz="1800"/>
             </a:lvl3pPr>
-            <a:lvl4pPr marL="1371600" indent="0">
-              <a:buNone/>
-              <a:defRPr sz="1000"/>
+            <a:lvl4pPr marL="2057400" indent="0">
+              <a:buNone/>
+              <a:defRPr sz="1500"/>
             </a:lvl4pPr>
-            <a:lvl5pPr marL="1828800" indent="0">
-              <a:buNone/>
-              <a:defRPr sz="1000"/>
+            <a:lvl5pPr marL="2743200" indent="0">
+              <a:buNone/>
+              <a:defRPr sz="1500"/>
             </a:lvl5pPr>
-            <a:lvl6pPr marL="2286000" indent="0">
-              <a:buNone/>
-              <a:defRPr sz="1000"/>
+            <a:lvl6pPr marL="3429000" indent="0">
+              <a:buNone/>
+              <a:defRPr sz="1500"/>
             </a:lvl6pPr>
-            <a:lvl7pPr marL="2743200" indent="0">
-              <a:buNone/>
-              <a:defRPr sz="1000"/>
+            <a:lvl7pPr marL="4114800" indent="0">
+              <a:buNone/>
+              <a:defRPr sz="1500"/>
             </a:lvl7pPr>
-            <a:lvl8pPr marL="3200400" indent="0">
-              <a:buNone/>
-              <a:defRPr sz="1000"/>
+            <a:lvl8pPr marL="4800600" indent="0">
+              <a:buNone/>
+              <a:defRPr sz="1500"/>
             </a:lvl8pPr>
-            <a:lvl9pPr marL="3657600" indent="0">
-              <a:buNone/>
-              <a:defRPr sz="1000"/>
+            <a:lvl9pPr marL="5486400" indent="0">
+              <a:buNone/>
+              <a:defRPr sz="1500"/>
             </a:lvl9pPr>
           </a:lstStyle>
           <a:p>
@@ -2093,7 +2099,7 @@
           <a:p>
             <a:fld id="{94AEC798-097D-4CC0-8FC4-AE38FC7ECE7F}" type="datetimeFigureOut">
               <a:rPr lang="ko-KR" altLang="en-US" smtClean="0"/>
-              <a:t>2026-07-09</a:t>
+              <a:t>2026-08-19</a:t>
             </a:fld>
             <a:endParaRPr lang="ko-KR" altLang="en-US"/>
           </a:p>
@@ -2144,7 +2150,7 @@
     </p:spTree>
     <p:extLst>
       <p:ext uri="{BB962C8B-B14F-4D97-AF65-F5344CB8AC3E}">
-        <p14:creationId xmlns:p14="http://schemas.microsoft.com/office/powerpoint/2010/main" val="1438923636"/>
+        <p14:creationId xmlns:p14="http://schemas.microsoft.com/office/powerpoint/2010/main" val="93498588"/>
       </p:ext>
     </p:extLst>
   </p:cSld>
@@ -2183,15 +2189,15 @@
         </p:nvSpPr>
         <p:spPr>
           <a:xfrm>
-            <a:off x="839788" y="457200"/>
-            <a:ext cx="3932237" cy="1600200"/>
+            <a:off x="1259683" y="685800"/>
+            <a:ext cx="5898356" cy="2400300"/>
           </a:xfrm>
         </p:spPr>
         <p:txBody>
           <a:bodyPr anchor="b"/>
           <a:lstStyle>
             <a:lvl1pPr>
-              <a:defRPr sz="3200"/>
+              <a:defRPr sz="4800"/>
             </a:lvl1pPr>
           </a:lstStyle>
           <a:p>
@@ -2215,8 +2221,8 @@
         </p:nvSpPr>
         <p:spPr>
           <a:xfrm>
-            <a:off x="5183188" y="987425"/>
-            <a:ext cx="6172200" cy="4873625"/>
+            <a:off x="7774782" y="1481138"/>
+            <a:ext cx="9258300" cy="7310438"/>
           </a:xfrm>
         </p:spPr>
         <p:txBody>
@@ -2224,39 +2230,39 @@
           <a:lstStyle>
             <a:lvl1pPr marL="0" indent="0">
               <a:buNone/>
-              <a:defRPr sz="3200"/>
+              <a:defRPr sz="4800"/>
             </a:lvl1pPr>
-            <a:lvl2pPr marL="457200" indent="0">
-              <a:buNone/>
-              <a:defRPr sz="2800"/>
+            <a:lvl2pPr marL="685800" indent="0">
+              <a:buNone/>
+              <a:defRPr sz="4200"/>
             </a:lvl2pPr>
-            <a:lvl3pPr marL="914400" indent="0">
-              <a:buNone/>
-              <a:defRPr sz="2400"/>
+            <a:lvl3pPr marL="1371600" indent="0">
+              <a:buNone/>
+              <a:defRPr sz="3600"/>
             </a:lvl3pPr>
-            <a:lvl4pPr marL="1371600" indent="0">
-              <a:buNone/>
-              <a:defRPr sz="2000"/>
+            <a:lvl4pPr marL="2057400" indent="0">
+              <a:buNone/>
+              <a:defRPr sz="3000"/>
             </a:lvl4pPr>
-            <a:lvl5pPr marL="1828800" indent="0">
-              <a:buNone/>
-              <a:defRPr sz="2000"/>
+            <a:lvl5pPr marL="2743200" indent="0">
+              <a:buNone/>
+              <a:defRPr sz="3000"/>
             </a:lvl5pPr>
-            <a:lvl6pPr marL="2286000" indent="0">
-              <a:buNone/>
-              <a:defRPr sz="2000"/>
+            <a:lvl6pPr marL="3429000" indent="0">
+              <a:buNone/>
+              <a:defRPr sz="3000"/>
             </a:lvl6pPr>
-            <a:lvl7pPr marL="2743200" indent="0">
-              <a:buNone/>
-              <a:defRPr sz="2000"/>
+            <a:lvl7pPr marL="4114800" indent="0">
+              <a:buNone/>
+              <a:defRPr sz="3000"/>
             </a:lvl7pPr>
-            <a:lvl8pPr marL="3200400" indent="0">
-              <a:buNone/>
-              <a:defRPr sz="2000"/>
+            <a:lvl8pPr marL="4800600" indent="0">
+              <a:buNone/>
+              <a:defRPr sz="3000"/>
             </a:lvl8pPr>
-            <a:lvl9pPr marL="3657600" indent="0">
-              <a:buNone/>
-              <a:defRPr sz="2000"/>
+            <a:lvl9pPr marL="5486400" indent="0">
+              <a:buNone/>
+              <a:defRPr sz="3000"/>
             </a:lvl9pPr>
           </a:lstStyle>
           <a:p>
@@ -2280,8 +2286,8 @@
         </p:nvSpPr>
         <p:spPr>
           <a:xfrm>
-            <a:off x="839788" y="2057400"/>
-            <a:ext cx="3932237" cy="3811588"/>
+            <a:off x="1259683" y="3086100"/>
+            <a:ext cx="5898356" cy="5717382"/>
           </a:xfrm>
         </p:spPr>
         <p:txBody>
@@ -2289,39 +2295,39 @@
           <a:lstStyle>
             <a:lvl1pPr marL="0" indent="0">
               <a:buNone/>
-              <a:defRPr sz="1600"/>
+              <a:defRPr sz="2400"/>
             </a:lvl1pPr>
-            <a:lvl2pPr marL="457200" indent="0">
-              <a:buNone/>
-              <a:defRPr sz="1400"/>
+            <a:lvl2pPr marL="685800" indent="0">
+              <a:buNone/>
+              <a:defRPr sz="2100"/>
             </a:lvl2pPr>
-            <a:lvl3pPr marL="914400" indent="0">
-              <a:buNone/>
-              <a:defRPr sz="1200"/>
+            <a:lvl3pPr marL="1371600" indent="0">
+              <a:buNone/>
+              <a:defRPr sz="1800"/>
             </a:lvl3pPr>
-            <a:lvl4pPr marL="1371600" indent="0">
-              <a:buNone/>
-              <a:defRPr sz="1000"/>
+            <a:lvl4pPr marL="2057400" indent="0">
+              <a:buNone/>
+              <a:defRPr sz="1500"/>
             </a:lvl4pPr>
-            <a:lvl5pPr marL="1828800" indent="0">
-              <a:buNone/>
-              <a:defRPr sz="1000"/>
+            <a:lvl5pPr marL="2743200" indent="0">
+              <a:buNone/>
+              <a:defRPr sz="1500"/>
             </a:lvl5pPr>
-            <a:lvl6pPr marL="2286000" indent="0">
-              <a:buNone/>
-              <a:defRPr sz="1000"/>
+            <a:lvl6pPr marL="3429000" indent="0">
+              <a:buNone/>
+              <a:defRPr sz="1500"/>
             </a:lvl6pPr>
-            <a:lvl7pPr marL="2743200" indent="0">
-              <a:buNone/>
-              <a:defRPr sz="1000"/>
+            <a:lvl7pPr marL="4114800" indent="0">
+              <a:buNone/>
+              <a:defRPr sz="1500"/>
             </a:lvl7pPr>
-            <a:lvl8pPr marL="3200400" indent="0">
-              <a:buNone/>
-              <a:defRPr sz="1000"/>
+            <a:lvl8pPr marL="4800600" indent="0">
+              <a:buNone/>
+              <a:defRPr sz="1500"/>
             </a:lvl8pPr>
-            <a:lvl9pPr marL="3657600" indent="0">
-              <a:buNone/>
-              <a:defRPr sz="1000"/>
+            <a:lvl9pPr marL="5486400" indent="0">
+              <a:buNone/>
+              <a:defRPr sz="1500"/>
             </a:lvl9pPr>
           </a:lstStyle>
           <a:p>
@@ -2350,7 +2356,7 @@
           <a:p>
             <a:fld id="{94AEC798-097D-4CC0-8FC4-AE38FC7ECE7F}" type="datetimeFigureOut">
               <a:rPr lang="ko-KR" altLang="en-US" smtClean="0"/>
-              <a:t>2026-07-09</a:t>
+              <a:t>2026-08-19</a:t>
             </a:fld>
             <a:endParaRPr lang="ko-KR" altLang="en-US"/>
           </a:p>
@@ -2401,7 +2407,7 @@
     </p:spTree>
     <p:extLst>
       <p:ext uri="{BB962C8B-B14F-4D97-AF65-F5344CB8AC3E}">
-        <p14:creationId xmlns:p14="http://schemas.microsoft.com/office/powerpoint/2010/main" val="2620506687"/>
+        <p14:creationId xmlns:p14="http://schemas.microsoft.com/office/powerpoint/2010/main" val="2667988941"/>
       </p:ext>
     </p:extLst>
   </p:cSld>
@@ -2445,8 +2451,8 @@
         </p:nvSpPr>
         <p:spPr>
           <a:xfrm>
-            <a:off x="838200" y="365125"/>
-            <a:ext cx="10515600" cy="1325563"/>
+            <a:off x="1257300" y="547688"/>
+            <a:ext cx="15773400" cy="1988345"/>
           </a:xfrm>
           <a:prstGeom prst="rect">
             <a:avLst/>
@@ -2478,8 +2484,8 @@
         </p:nvSpPr>
         <p:spPr>
           <a:xfrm>
-            <a:off x="838200" y="1825625"/>
-            <a:ext cx="10515600" cy="4351338"/>
+            <a:off x="1257300" y="2738438"/>
+            <a:ext cx="15773400" cy="6527007"/>
           </a:xfrm>
           <a:prstGeom prst="rect">
             <a:avLst/>
@@ -2540,8 +2546,8 @@
         </p:nvSpPr>
         <p:spPr>
           <a:xfrm>
-            <a:off x="838200" y="6356350"/>
-            <a:ext cx="2743200" cy="365125"/>
+            <a:off x="1257300" y="9534526"/>
+            <a:ext cx="4114800" cy="547688"/>
           </a:xfrm>
           <a:prstGeom prst="rect">
             <a:avLst/>
@@ -2551,7 +2557,7 @@
           <a:bodyPr vert="horz" lIns="91440" tIns="45720" rIns="91440" bIns="45720" rtlCol="0" anchor="ctr"/>
           <a:lstStyle>
             <a:lvl1pPr algn="l">
-              <a:defRPr sz="1200">
+              <a:defRPr sz="1800">
                 <a:solidFill>
                   <a:schemeClr val="tx1">
                     <a:tint val="75000"/>
@@ -2563,7 +2569,7 @@
           <a:p>
             <a:fld id="{94AEC798-097D-4CC0-8FC4-AE38FC7ECE7F}" type="datetimeFigureOut">
               <a:rPr lang="ko-KR" altLang="en-US" smtClean="0"/>
-              <a:t>2026-07-09</a:t>
+              <a:t>2026-08-19</a:t>
             </a:fld>
             <a:endParaRPr lang="ko-KR" altLang="en-US"/>
           </a:p>
@@ -2581,8 +2587,8 @@
         </p:nvSpPr>
         <p:spPr>
           <a:xfrm>
-            <a:off x="4038600" y="6356350"/>
-            <a:ext cx="4114800" cy="365125"/>
+            <a:off x="6057900" y="9534526"/>
+            <a:ext cx="6172200" cy="547688"/>
           </a:xfrm>
           <a:prstGeom prst="rect">
             <a:avLst/>
@@ -2592,7 +2598,7 @@
           <a:bodyPr vert="horz" lIns="91440" tIns="45720" rIns="91440" bIns="45720" rtlCol="0" anchor="ctr"/>
           <a:lstStyle>
             <a:lvl1pPr algn="ctr">
-              <a:defRPr sz="1200">
+              <a:defRPr sz="1800">
                 <a:solidFill>
                   <a:schemeClr val="tx1">
                     <a:tint val="75000"/>
@@ -2618,8 +2624,8 @@
         </p:nvSpPr>
         <p:spPr>
           <a:xfrm>
-            <a:off x="8610600" y="6356350"/>
-            <a:ext cx="2743200" cy="365125"/>
+            <a:off x="12915900" y="9534526"/>
+            <a:ext cx="4114800" cy="547688"/>
           </a:xfrm>
           <a:prstGeom prst="rect">
             <a:avLst/>
@@ -2629,7 +2635,7 @@
           <a:bodyPr vert="horz" lIns="91440" tIns="45720" rIns="91440" bIns="45720" rtlCol="0" anchor="ctr"/>
           <a:lstStyle>
             <a:lvl1pPr algn="r">
-              <a:defRPr sz="1200">
+              <a:defRPr sz="1800">
                 <a:solidFill>
                   <a:schemeClr val="tx1">
                     <a:tint val="75000"/>
@@ -2650,27 +2656,27 @@
     </p:spTree>
     <p:extLst>
       <p:ext uri="{BB962C8B-B14F-4D97-AF65-F5344CB8AC3E}">
-        <p14:creationId xmlns:p14="http://schemas.microsoft.com/office/powerpoint/2010/main" val="3300153555"/>
+        <p14:creationId xmlns:p14="http://schemas.microsoft.com/office/powerpoint/2010/main" val="3328665732"/>
       </p:ext>
     </p:extLst>
   </p:cSld>
   <p:clrMap bg1="dk1" tx1="lt1" bg2="dk2" tx2="lt2" accent1="accent1" accent2="accent2" accent3="accent3" accent4="accent4" accent5="accent5" accent6="accent6" hlink="hlink" folHlink="folHlink"/>
   <p:sldLayoutIdLst>
-    <p:sldLayoutId id="2147483661" r:id="rId1"/>
-    <p:sldLayoutId id="2147483662" r:id="rId2"/>
-    <p:sldLayoutId id="2147483663" r:id="rId3"/>
-    <p:sldLayoutId id="2147483664" r:id="rId4"/>
-    <p:sldLayoutId id="2147483665" r:id="rId5"/>
-    <p:sldLayoutId id="2147483666" r:id="rId6"/>
-    <p:sldLayoutId id="2147483667" r:id="rId7"/>
-    <p:sldLayoutId id="2147483668" r:id="rId8"/>
-    <p:sldLayoutId id="2147483669" r:id="rId9"/>
-    <p:sldLayoutId id="2147483670" r:id="rId10"/>
-    <p:sldLayoutId id="2147483671" r:id="rId11"/>
+    <p:sldLayoutId id="2147483673" r:id="rId1"/>
+    <p:sldLayoutId id="2147483674" r:id="rId2"/>
+    <p:sldLayoutId id="2147483675" r:id="rId3"/>
+    <p:sldLayoutId id="2147483676" r:id="rId4"/>
+    <p:sldLayoutId id="2147483677" r:id="rId5"/>
+    <p:sldLayoutId id="2147483678" r:id="rId6"/>
+    <p:sldLayoutId id="2147483679" r:id="rId7"/>
+    <p:sldLayoutId id="2147483680" r:id="rId8"/>
+    <p:sldLayoutId id="2147483681" r:id="rId9"/>
+    <p:sldLayoutId id="2147483682" r:id="rId10"/>
+    <p:sldLayoutId id="2147483683" r:id="rId11"/>
   </p:sldLayoutIdLst>
   <p:txStyles>
     <p:titleStyle>
-      <a:lvl1pPr algn="l" defTabSz="914400" rtl="0" eaLnBrk="1" latinLnBrk="1" hangingPunct="1">
+      <a:lvl1pPr algn="l" defTabSz="1371600" rtl="0" eaLnBrk="1" latinLnBrk="1" hangingPunct="1">
         <a:lnSpc>
           <a:spcPct val="90000"/>
         </a:lnSpc>
@@ -2678,7 +2684,7 @@
           <a:spcPct val="0"/>
         </a:spcBef>
         <a:buNone/>
-        <a:defRPr sz="4400" kern="1200">
+        <a:defRPr sz="6600" kern="1200">
           <a:solidFill>
             <a:schemeClr val="tx1"/>
           </a:solidFill>
@@ -2689,16 +2695,16 @@
       </a:lvl1pPr>
     </p:titleStyle>
     <p:bodyStyle>
-      <a:lvl1pPr marL="228600" indent="-228600" algn="l" defTabSz="914400" rtl="0" eaLnBrk="1" latinLnBrk="1" hangingPunct="1">
+      <a:lvl1pPr marL="342900" indent="-342900" algn="l" defTabSz="1371600" rtl="0" eaLnBrk="1" latinLnBrk="1" hangingPunct="1">
         <a:lnSpc>
           <a:spcPct val="90000"/>
         </a:lnSpc>
         <a:spcBef>
-          <a:spcPts val="1000"/>
+          <a:spcPts val="1500"/>
         </a:spcBef>
         <a:buFont typeface="Arial" panose="020B0604020202020204" pitchFamily="34" charset="0"/>
         <a:buChar char="•"/>
-        <a:defRPr sz="2800" kern="1200">
+        <a:defRPr sz="4200" kern="1200">
           <a:solidFill>
             <a:schemeClr val="tx1"/>
           </a:solidFill>
@@ -2707,16 +2713,16 @@
           <a:cs typeface="+mn-cs"/>
         </a:defRPr>
       </a:lvl1pPr>
-      <a:lvl2pPr marL="685800" indent="-228600" algn="l" defTabSz="914400" rtl="0" eaLnBrk="1" latinLnBrk="1" hangingPunct="1">
+      <a:lvl2pPr marL="1028700" indent="-342900" algn="l" defTabSz="1371600" rtl="0" eaLnBrk="1" latinLnBrk="1" hangingPunct="1">
         <a:lnSpc>
           <a:spcPct val="90000"/>
         </a:lnSpc>
         <a:spcBef>
-          <a:spcPts val="500"/>
+          <a:spcPts val="750"/>
         </a:spcBef>
         <a:buFont typeface="Arial" panose="020B0604020202020204" pitchFamily="34" charset="0"/>
         <a:buChar char="•"/>
-        <a:defRPr sz="2400" kern="1200">
+        <a:defRPr sz="3600" kern="1200">
           <a:solidFill>
             <a:schemeClr val="tx1"/>
           </a:solidFill>
@@ -2725,16 +2731,16 @@
           <a:cs typeface="+mn-cs"/>
         </a:defRPr>
       </a:lvl2pPr>
-      <a:lvl3pPr marL="1143000" indent="-228600" algn="l" defTabSz="914400" rtl="0" eaLnBrk="1" latinLnBrk="1" hangingPunct="1">
+      <a:lvl3pPr marL="1714500" indent="-342900" algn="l" defTabSz="1371600" rtl="0" eaLnBrk="1" latinLnBrk="1" hangingPunct="1">
         <a:lnSpc>
           <a:spcPct val="90000"/>
         </a:lnSpc>
         <a:spcBef>
-          <a:spcPts val="500"/>
+          <a:spcPts val="750"/>
         </a:spcBef>
         <a:buFont typeface="Arial" panose="020B0604020202020204" pitchFamily="34" charset="0"/>
         <a:buChar char="•"/>
-        <a:defRPr sz="2000" kern="1200">
+        <a:defRPr sz="3000" kern="1200">
           <a:solidFill>
             <a:schemeClr val="tx1"/>
           </a:solidFill>
@@ -2743,16 +2749,16 @@
           <a:cs typeface="+mn-cs"/>
         </a:defRPr>
       </a:lvl3pPr>
-      <a:lvl4pPr marL="1600200" indent="-228600" algn="l" defTabSz="914400" rtl="0" eaLnBrk="1" latinLnBrk="1" hangingPunct="1">
+      <a:lvl4pPr marL="2400300" indent="-342900" algn="l" defTabSz="1371600" rtl="0" eaLnBrk="1" latinLnBrk="1" hangingPunct="1">
         <a:lnSpc>
           <a:spcPct val="90000"/>
         </a:lnSpc>
         <a:spcBef>
-          <a:spcPts val="500"/>
+          <a:spcPts val="750"/>
         </a:spcBef>
         <a:buFont typeface="Arial" panose="020B0604020202020204" pitchFamily="34" charset="0"/>
         <a:buChar char="•"/>
-        <a:defRPr sz="1800" kern="1200">
+        <a:defRPr sz="2700" kern="1200">
           <a:solidFill>
             <a:schemeClr val="tx1"/>
           </a:solidFill>
@@ -2761,16 +2767,16 @@
           <a:cs typeface="+mn-cs"/>
         </a:defRPr>
       </a:lvl4pPr>
-      <a:lvl5pPr marL="2057400" indent="-228600" algn="l" defTabSz="914400" rtl="0" eaLnBrk="1" latinLnBrk="1" hangingPunct="1">
+      <a:lvl5pPr marL="3086100" indent="-342900" algn="l" defTabSz="1371600" rtl="0" eaLnBrk="1" latinLnBrk="1" hangingPunct="1">
         <a:lnSpc>
           <a:spcPct val="90000"/>
         </a:lnSpc>
         <a:spcBef>
-          <a:spcPts val="500"/>
+          <a:spcPts val="750"/>
         </a:spcBef>
         <a:buFont typeface="Arial" panose="020B0604020202020204" pitchFamily="34" charset="0"/>
         <a:buChar char="•"/>
-        <a:defRPr sz="1800" kern="1200">
+        <a:defRPr sz="2700" kern="1200">
           <a:solidFill>
             <a:schemeClr val="tx1"/>
           </a:solidFill>
@@ -2779,16 +2785,16 @@
           <a:cs typeface="+mn-cs"/>
         </a:defRPr>
       </a:lvl5pPr>
-      <a:lvl6pPr marL="2514600" indent="-228600" algn="l" defTabSz="914400" rtl="0" eaLnBrk="1" latinLnBrk="1" hangingPunct="1">
+      <a:lvl6pPr marL="3771900" indent="-342900" algn="l" defTabSz="1371600" rtl="0" eaLnBrk="1" latinLnBrk="1" hangingPunct="1">
         <a:lnSpc>
           <a:spcPct val="90000"/>
         </a:lnSpc>
         <a:spcBef>
-          <a:spcPts val="500"/>
+          <a:spcPts val="750"/>
         </a:spcBef>
         <a:buFont typeface="Arial" panose="020B0604020202020204" pitchFamily="34" charset="0"/>
         <a:buChar char="•"/>
-        <a:defRPr sz="1800" kern="1200">
+        <a:defRPr sz="2700" kern="1200">
           <a:solidFill>
             <a:schemeClr val="tx1"/>
           </a:solidFill>
@@ -2797,16 +2803,16 @@
           <a:cs typeface="+mn-cs"/>
         </a:defRPr>
       </a:lvl6pPr>
-      <a:lvl7pPr marL="2971800" indent="-228600" algn="l" defTabSz="914400" rtl="0" eaLnBrk="1" latinLnBrk="1" hangingPunct="1">
+      <a:lvl7pPr marL="4457700" indent="-342900" algn="l" defTabSz="1371600" rtl="0" eaLnBrk="1" latinLnBrk="1" hangingPunct="1">
         <a:lnSpc>
           <a:spcPct val="90000"/>
         </a:lnSpc>
         <a:spcBef>
-          <a:spcPts val="500"/>
+          <a:spcPts val="750"/>
         </a:spcBef>
         <a:buFont typeface="Arial" panose="020B0604020202020204" pitchFamily="34" charset="0"/>
         <a:buChar char="•"/>
-        <a:defRPr sz="1800" kern="1200">
+        <a:defRPr sz="2700" kern="1200">
           <a:solidFill>
             <a:schemeClr val="tx1"/>
           </a:solidFill>
@@ -2815,16 +2821,16 @@
           <a:cs typeface="+mn-cs"/>
         </a:defRPr>
       </a:lvl7pPr>
-      <a:lvl8pPr marL="3429000" indent="-228600" algn="l" defTabSz="914400" rtl="0" eaLnBrk="1" latinLnBrk="1" hangingPunct="1">
+      <a:lvl8pPr marL="5143500" indent="-342900" algn="l" defTabSz="1371600" rtl="0" eaLnBrk="1" latinLnBrk="1" hangingPunct="1">
         <a:lnSpc>
           <a:spcPct val="90000"/>
         </a:lnSpc>
         <a:spcBef>
-          <a:spcPts val="500"/>
+          <a:spcPts val="750"/>
         </a:spcBef>
         <a:buFont typeface="Arial" panose="020B0604020202020204" pitchFamily="34" charset="0"/>
         <a:buChar char="•"/>
-        <a:defRPr sz="1800" kern="1200">
+        <a:defRPr sz="2700" kern="1200">
           <a:solidFill>
             <a:schemeClr val="tx1"/>
           </a:solidFill>
@@ -2833,16 +2839,16 @@
           <a:cs typeface="+mn-cs"/>
         </a:defRPr>
       </a:lvl8pPr>
-      <a:lvl9pPr marL="3886200" indent="-228600" algn="l" defTabSz="914400" rtl="0" eaLnBrk="1" latinLnBrk="1" hangingPunct="1">
+      <a:lvl9pPr marL="5829300" indent="-342900" algn="l" defTabSz="1371600" rtl="0" eaLnBrk="1" latinLnBrk="1" hangingPunct="1">
         <a:lnSpc>
           <a:spcPct val="90000"/>
         </a:lnSpc>
         <a:spcBef>
-          <a:spcPts val="500"/>
+          <a:spcPts val="750"/>
         </a:spcBef>
         <a:buFont typeface="Arial" panose="020B0604020202020204" pitchFamily="34" charset="0"/>
         <a:buChar char="•"/>
-        <a:defRPr sz="1800" kern="1200">
+        <a:defRPr sz="2700" kern="1200">
           <a:solidFill>
             <a:schemeClr val="tx1"/>
           </a:solidFill>
@@ -2856,8 +2862,8 @@
       <a:defPPr>
         <a:defRPr lang="en-US"/>
       </a:defPPr>
-      <a:lvl1pPr marL="0" algn="l" defTabSz="914400" rtl="0" eaLnBrk="1" latinLnBrk="1" hangingPunct="1">
-        <a:defRPr sz="1800" kern="1200">
+      <a:lvl1pPr marL="0" algn="l" defTabSz="1371600" rtl="0" eaLnBrk="1" latinLnBrk="1" hangingPunct="1">
+        <a:defRPr sz="2700" kern="1200">
           <a:solidFill>
             <a:schemeClr val="tx1"/>
           </a:solidFill>
@@ -2866,8 +2872,8 @@
           <a:cs typeface="+mn-cs"/>
         </a:defRPr>
       </a:lvl1pPr>
-      <a:lvl2pPr marL="457200" algn="l" defTabSz="914400" rtl="0" eaLnBrk="1" latinLnBrk="1" hangingPunct="1">
-        <a:defRPr sz="1800" kern="1200">
+      <a:lvl2pPr marL="685800" algn="l" defTabSz="1371600" rtl="0" eaLnBrk="1" latinLnBrk="1" hangingPunct="1">
+        <a:defRPr sz="2700" kern="1200">
           <a:solidFill>
             <a:schemeClr val="tx1"/>
           </a:solidFill>
@@ -2876,8 +2882,8 @@
           <a:cs typeface="+mn-cs"/>
         </a:defRPr>
       </a:lvl2pPr>
-      <a:lvl3pPr marL="914400" algn="l" defTabSz="914400" rtl="0" eaLnBrk="1" latinLnBrk="1" hangingPunct="1">
-        <a:defRPr sz="1800" kern="1200">
+      <a:lvl3pPr marL="1371600" algn="l" defTabSz="1371600" rtl="0" eaLnBrk="1" latinLnBrk="1" hangingPunct="1">
+        <a:defRPr sz="2700" kern="1200">
           <a:solidFill>
             <a:schemeClr val="tx1"/>
           </a:solidFill>
@@ -2886,8 +2892,8 @@
           <a:cs typeface="+mn-cs"/>
         </a:defRPr>
       </a:lvl3pPr>
-      <a:lvl4pPr marL="1371600" algn="l" defTabSz="914400" rtl="0" eaLnBrk="1" latinLnBrk="1" hangingPunct="1">
-        <a:defRPr sz="1800" kern="1200">
+      <a:lvl4pPr marL="2057400" algn="l" defTabSz="1371600" rtl="0" eaLnBrk="1" latinLnBrk="1" hangingPunct="1">
+        <a:defRPr sz="2700" kern="1200">
           <a:solidFill>
             <a:schemeClr val="tx1"/>
           </a:solidFill>
@@ -2896,8 +2902,8 @@
           <a:cs typeface="+mn-cs"/>
         </a:defRPr>
       </a:lvl4pPr>
-      <a:lvl5pPr marL="1828800" algn="l" defTabSz="914400" rtl="0" eaLnBrk="1" latinLnBrk="1" hangingPunct="1">
-        <a:defRPr sz="1800" kern="1200">
+      <a:lvl5pPr marL="2743200" algn="l" defTabSz="1371600" rtl="0" eaLnBrk="1" latinLnBrk="1" hangingPunct="1">
+        <a:defRPr sz="2700" kern="1200">
           <a:solidFill>
             <a:schemeClr val="tx1"/>
           </a:solidFill>
@@ -2906,8 +2912,8 @@
           <a:cs typeface="+mn-cs"/>
         </a:defRPr>
       </a:lvl5pPr>
-      <a:lvl6pPr marL="2286000" algn="l" defTabSz="914400" rtl="0" eaLnBrk="1" latinLnBrk="1" hangingPunct="1">
-        <a:defRPr sz="1800" kern="1200">
+      <a:lvl6pPr marL="3429000" algn="l" defTabSz="1371600" rtl="0" eaLnBrk="1" latinLnBrk="1" hangingPunct="1">
+        <a:defRPr sz="2700" kern="1200">
           <a:solidFill>
             <a:schemeClr val="tx1"/>
           </a:solidFill>
@@ -2916,8 +2922,8 @@
           <a:cs typeface="+mn-cs"/>
         </a:defRPr>
       </a:lvl6pPr>
-      <a:lvl7pPr marL="2743200" algn="l" defTabSz="914400" rtl="0" eaLnBrk="1" latinLnBrk="1" hangingPunct="1">
-        <a:defRPr sz="1800" kern="1200">
+      <a:lvl7pPr marL="4114800" algn="l" defTabSz="1371600" rtl="0" eaLnBrk="1" latinLnBrk="1" hangingPunct="1">
+        <a:defRPr sz="2700" kern="1200">
           <a:solidFill>
             <a:schemeClr val="tx1"/>
           </a:solidFill>
@@ -2926,8 +2932,8 @@
           <a:cs typeface="+mn-cs"/>
         </a:defRPr>
       </a:lvl7pPr>
-      <a:lvl8pPr marL="3200400" algn="l" defTabSz="914400" rtl="0" eaLnBrk="1" latinLnBrk="1" hangingPunct="1">
-        <a:defRPr sz="1800" kern="1200">
+      <a:lvl8pPr marL="4800600" algn="l" defTabSz="1371600" rtl="0" eaLnBrk="1" latinLnBrk="1" hangingPunct="1">
+        <a:defRPr sz="2700" kern="1200">
           <a:solidFill>
             <a:schemeClr val="tx1"/>
           </a:solidFill>
@@ -2936,8 +2942,8 @@
           <a:cs typeface="+mn-cs"/>
         </a:defRPr>
       </a:lvl8pPr>
-      <a:lvl9pPr marL="3657600" algn="l" defTabSz="914400" rtl="0" eaLnBrk="1" latinLnBrk="1" hangingPunct="1">
-        <a:defRPr sz="1800" kern="1200">
+      <a:lvl9pPr marL="5486400" algn="l" defTabSz="1371600" rtl="0" eaLnBrk="1" latinLnBrk="1" hangingPunct="1">
+        <a:defRPr sz="2700" kern="1200">
           <a:solidFill>
             <a:schemeClr val="tx1"/>
           </a:solidFill>
@@ -2982,8 +2988,8 @@
         </p:nvCxnSpPr>
         <p:spPr>
           <a:xfrm>
-            <a:off x="381000" y="0"/>
-            <a:ext cx="0" cy="3857625"/>
+            <a:off x="571500" y="2"/>
+            <a:ext cx="0" cy="5786438"/>
           </a:xfrm>
           <a:prstGeom prst="line">
             <a:avLst/>
@@ -3028,8 +3034,8 @@
         </p:nvCxnSpPr>
         <p:spPr>
           <a:xfrm>
-            <a:off x="762000" y="0"/>
-            <a:ext cx="0" cy="3857625"/>
+            <a:off x="1143000" y="2"/>
+            <a:ext cx="0" cy="5786438"/>
           </a:xfrm>
           <a:prstGeom prst="line">
             <a:avLst/>
@@ -3074,8 +3080,8 @@
         </p:nvCxnSpPr>
         <p:spPr>
           <a:xfrm>
-            <a:off x="1143000" y="0"/>
-            <a:ext cx="0" cy="3857625"/>
+            <a:off x="1714500" y="2"/>
+            <a:ext cx="0" cy="5786438"/>
           </a:xfrm>
           <a:prstGeom prst="line">
             <a:avLst/>
@@ -3120,8 +3126,8 @@
         </p:nvCxnSpPr>
         <p:spPr>
           <a:xfrm>
-            <a:off x="1524000" y="0"/>
-            <a:ext cx="0" cy="3857625"/>
+            <a:off x="2286000" y="2"/>
+            <a:ext cx="0" cy="5786438"/>
           </a:xfrm>
           <a:prstGeom prst="line">
             <a:avLst/>
@@ -3166,8 +3172,8 @@
         </p:nvCxnSpPr>
         <p:spPr>
           <a:xfrm>
-            <a:off x="1905000" y="787"/>
-            <a:ext cx="0" cy="3857625"/>
+            <a:off x="2857500" y="1183"/>
+            <a:ext cx="0" cy="5786438"/>
           </a:xfrm>
           <a:prstGeom prst="line">
             <a:avLst/>
@@ -3212,8 +3218,8 @@
         </p:nvCxnSpPr>
         <p:spPr>
           <a:xfrm>
-            <a:off x="2286000" y="787"/>
-            <a:ext cx="0" cy="3857625"/>
+            <a:off x="3429000" y="1183"/>
+            <a:ext cx="0" cy="5786438"/>
           </a:xfrm>
           <a:prstGeom prst="line">
             <a:avLst/>
@@ -3258,8 +3264,8 @@
         </p:nvCxnSpPr>
         <p:spPr>
           <a:xfrm>
-            <a:off x="2667000" y="787"/>
-            <a:ext cx="0" cy="3857625"/>
+            <a:off x="4000500" y="1183"/>
+            <a:ext cx="0" cy="5786438"/>
           </a:xfrm>
           <a:prstGeom prst="line">
             <a:avLst/>
@@ -3304,8 +3310,8 @@
         </p:nvCxnSpPr>
         <p:spPr>
           <a:xfrm>
-            <a:off x="3048000" y="787"/>
-            <a:ext cx="0" cy="3857625"/>
+            <a:off x="4572000" y="1183"/>
+            <a:ext cx="0" cy="5786438"/>
           </a:xfrm>
           <a:prstGeom prst="line">
             <a:avLst/>
@@ -3350,8 +3356,8 @@
         </p:nvCxnSpPr>
         <p:spPr>
           <a:xfrm>
-            <a:off x="3810000" y="0"/>
-            <a:ext cx="0" cy="3857625"/>
+            <a:off x="5715000" y="2"/>
+            <a:ext cx="0" cy="5786438"/>
           </a:xfrm>
           <a:prstGeom prst="line">
             <a:avLst/>
@@ -3396,8 +3402,8 @@
         </p:nvCxnSpPr>
         <p:spPr>
           <a:xfrm>
-            <a:off x="4191000" y="0"/>
-            <a:ext cx="0" cy="3857625"/>
+            <a:off x="6286500" y="2"/>
+            <a:ext cx="0" cy="5786438"/>
           </a:xfrm>
           <a:prstGeom prst="line">
             <a:avLst/>
@@ -3442,8 +3448,8 @@
         </p:nvCxnSpPr>
         <p:spPr>
           <a:xfrm>
-            <a:off x="4572000" y="0"/>
-            <a:ext cx="0" cy="3857625"/>
+            <a:off x="6858000" y="2"/>
+            <a:ext cx="0" cy="5786438"/>
           </a:xfrm>
           <a:prstGeom prst="line">
             <a:avLst/>
@@ -3488,8 +3494,8 @@
         </p:nvCxnSpPr>
         <p:spPr>
           <a:xfrm>
-            <a:off x="4953000" y="0"/>
-            <a:ext cx="0" cy="3857625"/>
+            <a:off x="7429500" y="2"/>
+            <a:ext cx="0" cy="5786438"/>
           </a:xfrm>
           <a:prstGeom prst="line">
             <a:avLst/>
@@ -3534,8 +3540,8 @@
         </p:nvCxnSpPr>
         <p:spPr>
           <a:xfrm>
-            <a:off x="5334000" y="787"/>
-            <a:ext cx="0" cy="3857625"/>
+            <a:off x="8001000" y="1183"/>
+            <a:ext cx="0" cy="5786438"/>
           </a:xfrm>
           <a:prstGeom prst="line">
             <a:avLst/>
@@ -3580,8 +3586,8 @@
         </p:nvCxnSpPr>
         <p:spPr>
           <a:xfrm>
-            <a:off x="5715000" y="787"/>
-            <a:ext cx="0" cy="3857625"/>
+            <a:off x="8572500" y="1183"/>
+            <a:ext cx="0" cy="5786438"/>
           </a:xfrm>
           <a:prstGeom prst="line">
             <a:avLst/>
@@ -3626,8 +3632,8 @@
         </p:nvCxnSpPr>
         <p:spPr>
           <a:xfrm>
-            <a:off x="6096000" y="787"/>
-            <a:ext cx="0" cy="3857625"/>
+            <a:off x="9144000" y="1183"/>
+            <a:ext cx="0" cy="5786438"/>
           </a:xfrm>
           <a:prstGeom prst="line">
             <a:avLst/>
@@ -3672,8 +3678,376 @@
         </p:nvCxnSpPr>
         <p:spPr>
           <a:xfrm>
-            <a:off x="6477000" y="787"/>
-            <a:ext cx="0" cy="3857625"/>
+            <a:off x="9715500" y="1183"/>
+            <a:ext cx="0" cy="5786438"/>
+          </a:xfrm>
+          <a:prstGeom prst="line">
+            <a:avLst/>
+          </a:prstGeom>
+          <a:ln w="25400">
+            <a:solidFill>
+              <a:srgbClr val="7F7F7F"/>
+            </a:solidFill>
+          </a:ln>
+          <a:effectLst>
+            <a:outerShdw blurRad="50800" algn="ctr" rotWithShape="0">
+              <a:srgbClr val="7F7F7F"/>
+            </a:outerShdw>
+          </a:effectLst>
+        </p:spPr>
+        <p:style>
+          <a:lnRef idx="1">
+            <a:schemeClr val="accent1"/>
+          </a:lnRef>
+          <a:fillRef idx="0">
+            <a:schemeClr val="accent1"/>
+          </a:fillRef>
+          <a:effectRef idx="0">
+            <a:schemeClr val="accent1"/>
+          </a:effectRef>
+          <a:fontRef idx="minor">
+            <a:schemeClr val="tx1"/>
+          </a:fontRef>
+        </p:style>
+      </p:cxnSp>
+      <p:cxnSp>
+        <p:nvCxnSpPr>
+          <p:cNvPr id="7" name="직선 연결선 6">
+            <a:extLst>
+              <a:ext uri="{FF2B5EF4-FFF2-40B4-BE49-F238E27FC236}">
+                <a16:creationId xmlns:a16="http://schemas.microsoft.com/office/drawing/2014/main" id="{ECD9BE0D-B06A-A50A-D43B-06FFECCC608B}"/>
+              </a:ext>
+            </a:extLst>
+          </p:cNvPr>
+          <p:cNvCxnSpPr/>
+          <p:nvPr/>
+        </p:nvCxnSpPr>
+        <p:spPr>
+          <a:xfrm>
+            <a:off x="0" y="571500"/>
+            <a:ext cx="10287000" cy="0"/>
+          </a:xfrm>
+          <a:prstGeom prst="line">
+            <a:avLst/>
+          </a:prstGeom>
+          <a:ln w="25400">
+            <a:solidFill>
+              <a:srgbClr val="7F7F7F"/>
+            </a:solidFill>
+          </a:ln>
+          <a:effectLst>
+            <a:outerShdw blurRad="50800" algn="ctr" rotWithShape="0">
+              <a:srgbClr val="7F7F7F"/>
+            </a:outerShdw>
+          </a:effectLst>
+        </p:spPr>
+        <p:style>
+          <a:lnRef idx="1">
+            <a:schemeClr val="accent1"/>
+          </a:lnRef>
+          <a:fillRef idx="0">
+            <a:schemeClr val="accent1"/>
+          </a:fillRef>
+          <a:effectRef idx="0">
+            <a:schemeClr val="accent1"/>
+          </a:effectRef>
+          <a:fontRef idx="minor">
+            <a:schemeClr val="tx1"/>
+          </a:fontRef>
+        </p:style>
+      </p:cxnSp>
+      <p:cxnSp>
+        <p:nvCxnSpPr>
+          <p:cNvPr id="8" name="직선 연결선 7">
+            <a:extLst>
+              <a:ext uri="{FF2B5EF4-FFF2-40B4-BE49-F238E27FC236}">
+                <a16:creationId xmlns:a16="http://schemas.microsoft.com/office/drawing/2014/main" id="{3C416C48-40DF-4763-F5B2-DFDB7A99409D}"/>
+              </a:ext>
+            </a:extLst>
+          </p:cNvPr>
+          <p:cNvCxnSpPr/>
+          <p:nvPr/>
+        </p:nvCxnSpPr>
+        <p:spPr>
+          <a:xfrm>
+            <a:off x="0" y="1143000"/>
+            <a:ext cx="10287000" cy="0"/>
+          </a:xfrm>
+          <a:prstGeom prst="line">
+            <a:avLst/>
+          </a:prstGeom>
+          <a:ln w="25400">
+            <a:solidFill>
+              <a:srgbClr val="7F7F7F"/>
+            </a:solidFill>
+          </a:ln>
+          <a:effectLst>
+            <a:outerShdw blurRad="50800" algn="ctr" rotWithShape="0">
+              <a:srgbClr val="7F7F7F"/>
+            </a:outerShdw>
+          </a:effectLst>
+        </p:spPr>
+        <p:style>
+          <a:lnRef idx="1">
+            <a:schemeClr val="accent1"/>
+          </a:lnRef>
+          <a:fillRef idx="0">
+            <a:schemeClr val="accent1"/>
+          </a:fillRef>
+          <a:effectRef idx="0">
+            <a:schemeClr val="accent1"/>
+          </a:effectRef>
+          <a:fontRef idx="minor">
+            <a:schemeClr val="tx1"/>
+          </a:fontRef>
+        </p:style>
+      </p:cxnSp>
+      <p:cxnSp>
+        <p:nvCxnSpPr>
+          <p:cNvPr id="10" name="직선 연결선 9">
+            <a:extLst>
+              <a:ext uri="{FF2B5EF4-FFF2-40B4-BE49-F238E27FC236}">
+                <a16:creationId xmlns:a16="http://schemas.microsoft.com/office/drawing/2014/main" id="{0253A2D9-20DB-444E-57AD-963A47EDD8CA}"/>
+              </a:ext>
+            </a:extLst>
+          </p:cNvPr>
+          <p:cNvCxnSpPr/>
+          <p:nvPr/>
+        </p:nvCxnSpPr>
+        <p:spPr>
+          <a:xfrm>
+            <a:off x="0" y="1714500"/>
+            <a:ext cx="10287000" cy="0"/>
+          </a:xfrm>
+          <a:prstGeom prst="line">
+            <a:avLst/>
+          </a:prstGeom>
+          <a:ln w="25400">
+            <a:solidFill>
+              <a:srgbClr val="7F7F7F"/>
+            </a:solidFill>
+          </a:ln>
+          <a:effectLst>
+            <a:outerShdw blurRad="50800" algn="ctr" rotWithShape="0">
+              <a:srgbClr val="7F7F7F"/>
+            </a:outerShdw>
+          </a:effectLst>
+        </p:spPr>
+        <p:style>
+          <a:lnRef idx="1">
+            <a:schemeClr val="accent1"/>
+          </a:lnRef>
+          <a:fillRef idx="0">
+            <a:schemeClr val="accent1"/>
+          </a:fillRef>
+          <a:effectRef idx="0">
+            <a:schemeClr val="accent1"/>
+          </a:effectRef>
+          <a:fontRef idx="minor">
+            <a:schemeClr val="tx1"/>
+          </a:fontRef>
+        </p:style>
+      </p:cxnSp>
+      <p:cxnSp>
+        <p:nvCxnSpPr>
+          <p:cNvPr id="15" name="직선 연결선 14">
+            <a:extLst>
+              <a:ext uri="{FF2B5EF4-FFF2-40B4-BE49-F238E27FC236}">
+                <a16:creationId xmlns:a16="http://schemas.microsoft.com/office/drawing/2014/main" id="{FD0BD626-E164-A11B-5885-22E5065C1FAF}"/>
+              </a:ext>
+            </a:extLst>
+          </p:cNvPr>
+          <p:cNvCxnSpPr/>
+          <p:nvPr/>
+        </p:nvCxnSpPr>
+        <p:spPr>
+          <a:xfrm>
+            <a:off x="0" y="2286000"/>
+            <a:ext cx="10287000" cy="0"/>
+          </a:xfrm>
+          <a:prstGeom prst="line">
+            <a:avLst/>
+          </a:prstGeom>
+          <a:ln w="25400">
+            <a:solidFill>
+              <a:srgbClr val="7F7F7F"/>
+            </a:solidFill>
+          </a:ln>
+          <a:effectLst>
+            <a:outerShdw blurRad="50800" algn="ctr" rotWithShape="0">
+              <a:srgbClr val="7F7F7F"/>
+            </a:outerShdw>
+          </a:effectLst>
+        </p:spPr>
+        <p:style>
+          <a:lnRef idx="1">
+            <a:schemeClr val="accent1"/>
+          </a:lnRef>
+          <a:fillRef idx="0">
+            <a:schemeClr val="accent1"/>
+          </a:fillRef>
+          <a:effectRef idx="0">
+            <a:schemeClr val="accent1"/>
+          </a:effectRef>
+          <a:fontRef idx="minor">
+            <a:schemeClr val="tx1"/>
+          </a:fontRef>
+        </p:style>
+      </p:cxnSp>
+      <p:cxnSp>
+        <p:nvCxnSpPr>
+          <p:cNvPr id="16" name="직선 연결선 15">
+            <a:extLst>
+              <a:ext uri="{FF2B5EF4-FFF2-40B4-BE49-F238E27FC236}">
+                <a16:creationId xmlns:a16="http://schemas.microsoft.com/office/drawing/2014/main" id="{048ACEB7-6EA6-CA94-E3B6-437BE435CBB3}"/>
+              </a:ext>
+            </a:extLst>
+          </p:cNvPr>
+          <p:cNvCxnSpPr/>
+          <p:nvPr/>
+        </p:nvCxnSpPr>
+        <p:spPr>
+          <a:xfrm>
+            <a:off x="0" y="3429000"/>
+            <a:ext cx="10287000" cy="0"/>
+          </a:xfrm>
+          <a:prstGeom prst="line">
+            <a:avLst/>
+          </a:prstGeom>
+          <a:ln w="25400">
+            <a:solidFill>
+              <a:srgbClr val="7F7F7F"/>
+            </a:solidFill>
+          </a:ln>
+          <a:effectLst>
+            <a:outerShdw blurRad="50800" algn="ctr" rotWithShape="0">
+              <a:srgbClr val="7F7F7F"/>
+            </a:outerShdw>
+          </a:effectLst>
+        </p:spPr>
+        <p:style>
+          <a:lnRef idx="1">
+            <a:schemeClr val="accent1"/>
+          </a:lnRef>
+          <a:fillRef idx="0">
+            <a:schemeClr val="accent1"/>
+          </a:fillRef>
+          <a:effectRef idx="0">
+            <a:schemeClr val="accent1"/>
+          </a:effectRef>
+          <a:fontRef idx="minor">
+            <a:schemeClr val="tx1"/>
+          </a:fontRef>
+        </p:style>
+      </p:cxnSp>
+      <p:cxnSp>
+        <p:nvCxnSpPr>
+          <p:cNvPr id="29" name="직선 연결선 28">
+            <a:extLst>
+              <a:ext uri="{FF2B5EF4-FFF2-40B4-BE49-F238E27FC236}">
+                <a16:creationId xmlns:a16="http://schemas.microsoft.com/office/drawing/2014/main" id="{A8D823BE-EEF8-E43B-23AC-12BA505D8B44}"/>
+              </a:ext>
+            </a:extLst>
+          </p:cNvPr>
+          <p:cNvCxnSpPr/>
+          <p:nvPr/>
+        </p:nvCxnSpPr>
+        <p:spPr>
+          <a:xfrm>
+            <a:off x="0" y="4000500"/>
+            <a:ext cx="10287000" cy="0"/>
+          </a:xfrm>
+          <a:prstGeom prst="line">
+            <a:avLst/>
+          </a:prstGeom>
+          <a:ln w="25400">
+            <a:solidFill>
+              <a:srgbClr val="7F7F7F"/>
+            </a:solidFill>
+          </a:ln>
+          <a:effectLst>
+            <a:outerShdw blurRad="50800" algn="ctr" rotWithShape="0">
+              <a:srgbClr val="7F7F7F"/>
+            </a:outerShdw>
+          </a:effectLst>
+        </p:spPr>
+        <p:style>
+          <a:lnRef idx="1">
+            <a:schemeClr val="accent1"/>
+          </a:lnRef>
+          <a:fillRef idx="0">
+            <a:schemeClr val="accent1"/>
+          </a:fillRef>
+          <a:effectRef idx="0">
+            <a:schemeClr val="accent1"/>
+          </a:effectRef>
+          <a:fontRef idx="minor">
+            <a:schemeClr val="tx1"/>
+          </a:fontRef>
+        </p:style>
+      </p:cxnSp>
+      <p:cxnSp>
+        <p:nvCxnSpPr>
+          <p:cNvPr id="30" name="직선 연결선 29">
+            <a:extLst>
+              <a:ext uri="{FF2B5EF4-FFF2-40B4-BE49-F238E27FC236}">
+                <a16:creationId xmlns:a16="http://schemas.microsoft.com/office/drawing/2014/main" id="{37BC18AE-0736-B101-6CD5-6B3EE040EA47}"/>
+              </a:ext>
+            </a:extLst>
+          </p:cNvPr>
+          <p:cNvCxnSpPr/>
+          <p:nvPr/>
+        </p:nvCxnSpPr>
+        <p:spPr>
+          <a:xfrm>
+            <a:off x="0" y="4572000"/>
+            <a:ext cx="10287000" cy="0"/>
+          </a:xfrm>
+          <a:prstGeom prst="line">
+            <a:avLst/>
+          </a:prstGeom>
+          <a:ln w="25400">
+            <a:solidFill>
+              <a:srgbClr val="7F7F7F"/>
+            </a:solidFill>
+          </a:ln>
+          <a:effectLst>
+            <a:outerShdw blurRad="50800" algn="ctr" rotWithShape="0">
+              <a:srgbClr val="7F7F7F"/>
+            </a:outerShdw>
+          </a:effectLst>
+        </p:spPr>
+        <p:style>
+          <a:lnRef idx="1">
+            <a:schemeClr val="accent1"/>
+          </a:lnRef>
+          <a:fillRef idx="0">
+            <a:schemeClr val="accent1"/>
+          </a:fillRef>
+          <a:effectRef idx="0">
+            <a:schemeClr val="accent1"/>
+          </a:effectRef>
+          <a:fontRef idx="minor">
+            <a:schemeClr val="tx1"/>
+          </a:fontRef>
+        </p:style>
+      </p:cxnSp>
+      <p:cxnSp>
+        <p:nvCxnSpPr>
+          <p:cNvPr id="31" name="직선 연결선 30">
+            <a:extLst>
+              <a:ext uri="{FF2B5EF4-FFF2-40B4-BE49-F238E27FC236}">
+                <a16:creationId xmlns:a16="http://schemas.microsoft.com/office/drawing/2014/main" id="{6AFFFDAC-669D-CB9D-76F4-55267E4618FB}"/>
+              </a:ext>
+            </a:extLst>
+          </p:cNvPr>
+          <p:cNvCxnSpPr/>
+          <p:nvPr/>
+        </p:nvCxnSpPr>
+        <p:spPr>
+          <a:xfrm>
+            <a:off x="0" y="5143500"/>
+            <a:ext cx="10287000" cy="0"/>
           </a:xfrm>
           <a:prstGeom prst="line">
             <a:avLst/>
@@ -3718,8 +4092,8 @@
         </p:nvCxnSpPr>
         <p:spPr>
           <a:xfrm>
-            <a:off x="0" y="1929600"/>
-            <a:ext cx="6858000" cy="0"/>
+            <a:off x="0" y="2894400"/>
+            <a:ext cx="10287000" cy="0"/>
           </a:xfrm>
           <a:prstGeom prst="straightConnector1">
             <a:avLst/>
@@ -3765,8 +4139,8 @@
         </p:nvCxnSpPr>
         <p:spPr>
           <a:xfrm flipV="1">
-            <a:off x="3430800" y="0"/>
-            <a:ext cx="0" cy="3857625"/>
+            <a:off x="5146200" y="2"/>
+            <a:ext cx="0" cy="5786438"/>
           </a:xfrm>
           <a:prstGeom prst="straightConnector1">
             <a:avLst/>
@@ -3798,10 +4172,1355 @@
           </a:fontRef>
         </p:style>
       </p:cxnSp>
+      <p:sp>
+        <p:nvSpPr>
+          <p:cNvPr id="2" name="타원 1">
+            <a:extLst>
+              <a:ext uri="{FF2B5EF4-FFF2-40B4-BE49-F238E27FC236}">
+                <a16:creationId xmlns:a16="http://schemas.microsoft.com/office/drawing/2014/main" id="{6F16227B-A8D8-4BDF-93C2-2B9CF1CA4D71}"/>
+              </a:ext>
+            </a:extLst>
+          </p:cNvPr>
+          <p:cNvSpPr/>
+          <p:nvPr/>
+        </p:nvSpPr>
+        <p:spPr>
+          <a:xfrm>
+            <a:off x="10284300" y="0"/>
+            <a:ext cx="135000" cy="135000"/>
+          </a:xfrm>
+          <a:prstGeom prst="ellipse">
+            <a:avLst/>
+          </a:prstGeom>
+          <a:solidFill>
+            <a:schemeClr val="tx1"/>
+          </a:solidFill>
+          <a:ln>
+            <a:noFill/>
+          </a:ln>
+          <a:effectLst>
+            <a:outerShdw blurRad="101600" algn="ctr" rotWithShape="0">
+              <a:schemeClr val="tx1"/>
+            </a:outerShdw>
+          </a:effectLst>
+        </p:spPr>
+        <p:style>
+          <a:lnRef idx="2">
+            <a:schemeClr val="accent1">
+              <a:shade val="15000"/>
+            </a:schemeClr>
+          </a:lnRef>
+          <a:fillRef idx="1">
+            <a:schemeClr val="accent1"/>
+          </a:fillRef>
+          <a:effectRef idx="0">
+            <a:schemeClr val="accent1"/>
+          </a:effectRef>
+          <a:fontRef idx="minor">
+            <a:schemeClr val="lt1"/>
+          </a:fontRef>
+        </p:style>
+        <p:txBody>
+          <a:bodyPr rtlCol="0" anchor="ctr"/>
+          <a:lstStyle/>
+          <a:p>
+            <a:pPr algn="ctr"/>
+            <a:endParaRPr lang="ko-KR" altLang="en-US" sz="4050"/>
+          </a:p>
+        </p:txBody>
+      </p:sp>
+      <p:cxnSp>
+        <p:nvCxnSpPr>
+          <p:cNvPr id="4" name="직선 연결선 3">
+            <a:extLst>
+              <a:ext uri="{FF2B5EF4-FFF2-40B4-BE49-F238E27FC236}">
+                <a16:creationId xmlns:a16="http://schemas.microsoft.com/office/drawing/2014/main" id="{89AE77F1-88B2-DD74-4B77-D7A20F9E117E}"/>
+              </a:ext>
+            </a:extLst>
+          </p:cNvPr>
+          <p:cNvCxnSpPr>
+            <a:cxnSpLocks/>
+          </p:cNvCxnSpPr>
+          <p:nvPr/>
+        </p:nvCxnSpPr>
+        <p:spPr>
+          <a:xfrm flipV="1">
+            <a:off x="11400" y="5786438"/>
+            <a:ext cx="11804400" cy="0"/>
+          </a:xfrm>
+          <a:prstGeom prst="line">
+            <a:avLst/>
+          </a:prstGeom>
+          <a:ln w="38100">
+            <a:solidFill>
+              <a:schemeClr val="tx1"/>
+            </a:solidFill>
+          </a:ln>
+          <a:effectLst>
+            <a:outerShdw blurRad="101600" algn="ctr" rotWithShape="0">
+              <a:schemeClr val="tx1"/>
+            </a:outerShdw>
+          </a:effectLst>
+        </p:spPr>
+        <p:style>
+          <a:lnRef idx="1">
+            <a:schemeClr val="accent1"/>
+          </a:lnRef>
+          <a:fillRef idx="0">
+            <a:schemeClr val="accent1"/>
+          </a:fillRef>
+          <a:effectRef idx="0">
+            <a:schemeClr val="accent1"/>
+          </a:effectRef>
+          <a:fontRef idx="minor">
+            <a:schemeClr val="tx1"/>
+          </a:fontRef>
+        </p:style>
+      </p:cxnSp>
     </p:spTree>
     <p:extLst>
       <p:ext uri="{BB962C8B-B14F-4D97-AF65-F5344CB8AC3E}">
         <p14:creationId xmlns:p14="http://schemas.microsoft.com/office/powerpoint/2010/main" val="635867736"/>
+      </p:ext>
+    </p:extLst>
+  </p:cSld>
+  <p:clrMapOvr>
+    <a:masterClrMapping/>
+  </p:clrMapOvr>
+</p:sld>
+</file>
+
+<file path=ppt/slides/slide2.xml><?xml version="1.0" encoding="utf-8"?>
+<p:sld xmlns:a="http://schemas.openxmlformats.org/drawingml/2006/main" xmlns:r="http://schemas.openxmlformats.org/officeDocument/2006/relationships" xmlns:p="http://schemas.openxmlformats.org/presentationml/2006/main">
+  <p:cSld>
+    <p:bg>
+      <p:bgPr>
+        <a:solidFill>
+          <a:schemeClr val="bg1"/>
+        </a:solidFill>
+        <a:effectLst/>
+      </p:bgPr>
+    </p:bg>
+    <p:spTree>
+      <p:nvGrpSpPr>
+        <p:cNvPr id="1" name="">
+          <a:extLst>
+            <a:ext uri="{FF2B5EF4-FFF2-40B4-BE49-F238E27FC236}">
+              <a16:creationId xmlns:a16="http://schemas.microsoft.com/office/drawing/2014/main" id="{EBCA5ED7-2D15-E5EE-D767-EF0DFA8AF3DF}"/>
+            </a:ext>
+          </a:extLst>
+        </p:cNvPr>
+        <p:cNvGrpSpPr/>
+        <p:nvPr/>
+      </p:nvGrpSpPr>
+      <p:grpSpPr>
+        <a:xfrm>
+          <a:off x="0" y="0"/>
+          <a:ext cx="0" cy="0"/>
+          <a:chOff x="0" y="0"/>
+          <a:chExt cx="0" cy="0"/>
+        </a:xfrm>
+      </p:grpSpPr>
+      <p:cxnSp>
+        <p:nvCxnSpPr>
+          <p:cNvPr id="34" name="직선 연결선 33">
+            <a:extLst>
+              <a:ext uri="{FF2B5EF4-FFF2-40B4-BE49-F238E27FC236}">
+                <a16:creationId xmlns:a16="http://schemas.microsoft.com/office/drawing/2014/main" id="{3E6542DB-F4FE-4F29-B016-B18C794E6AF7}"/>
+              </a:ext>
+            </a:extLst>
+          </p:cNvPr>
+          <p:cNvCxnSpPr/>
+          <p:nvPr/>
+        </p:nvCxnSpPr>
+        <p:spPr>
+          <a:xfrm>
+            <a:off x="571500" y="2"/>
+            <a:ext cx="0" cy="5786438"/>
+          </a:xfrm>
+          <a:prstGeom prst="line">
+            <a:avLst/>
+          </a:prstGeom>
+          <a:ln w="25400">
+            <a:solidFill>
+              <a:srgbClr val="7F7F7F"/>
+            </a:solidFill>
+          </a:ln>
+          <a:effectLst>
+            <a:outerShdw blurRad="50800" algn="ctr" rotWithShape="0">
+              <a:srgbClr val="7F7F7F"/>
+            </a:outerShdw>
+          </a:effectLst>
+        </p:spPr>
+        <p:style>
+          <a:lnRef idx="1">
+            <a:schemeClr val="accent1"/>
+          </a:lnRef>
+          <a:fillRef idx="0">
+            <a:schemeClr val="accent1"/>
+          </a:fillRef>
+          <a:effectRef idx="0">
+            <a:schemeClr val="accent1"/>
+          </a:effectRef>
+          <a:fontRef idx="minor">
+            <a:schemeClr val="tx1"/>
+          </a:fontRef>
+        </p:style>
+      </p:cxnSp>
+      <p:cxnSp>
+        <p:nvCxnSpPr>
+          <p:cNvPr id="35" name="직선 연결선 34">
+            <a:extLst>
+              <a:ext uri="{FF2B5EF4-FFF2-40B4-BE49-F238E27FC236}">
+                <a16:creationId xmlns:a16="http://schemas.microsoft.com/office/drawing/2014/main" id="{FE9D02FD-90FE-64C4-3DA1-5331240DE94E}"/>
+              </a:ext>
+            </a:extLst>
+          </p:cNvPr>
+          <p:cNvCxnSpPr/>
+          <p:nvPr/>
+        </p:nvCxnSpPr>
+        <p:spPr>
+          <a:xfrm>
+            <a:off x="1143000" y="2"/>
+            <a:ext cx="0" cy="5786438"/>
+          </a:xfrm>
+          <a:prstGeom prst="line">
+            <a:avLst/>
+          </a:prstGeom>
+          <a:ln w="25400">
+            <a:solidFill>
+              <a:srgbClr val="7F7F7F"/>
+            </a:solidFill>
+          </a:ln>
+          <a:effectLst>
+            <a:outerShdw blurRad="50800" algn="ctr" rotWithShape="0">
+              <a:srgbClr val="7F7F7F"/>
+            </a:outerShdw>
+          </a:effectLst>
+        </p:spPr>
+        <p:style>
+          <a:lnRef idx="1">
+            <a:schemeClr val="accent1"/>
+          </a:lnRef>
+          <a:fillRef idx="0">
+            <a:schemeClr val="accent1"/>
+          </a:fillRef>
+          <a:effectRef idx="0">
+            <a:schemeClr val="accent1"/>
+          </a:effectRef>
+          <a:fontRef idx="minor">
+            <a:schemeClr val="tx1"/>
+          </a:fontRef>
+        </p:style>
+      </p:cxnSp>
+      <p:cxnSp>
+        <p:nvCxnSpPr>
+          <p:cNvPr id="36" name="직선 연결선 35">
+            <a:extLst>
+              <a:ext uri="{FF2B5EF4-FFF2-40B4-BE49-F238E27FC236}">
+                <a16:creationId xmlns:a16="http://schemas.microsoft.com/office/drawing/2014/main" id="{113DD208-1278-555C-F047-8D7C6CDA83C6}"/>
+              </a:ext>
+            </a:extLst>
+          </p:cNvPr>
+          <p:cNvCxnSpPr/>
+          <p:nvPr/>
+        </p:nvCxnSpPr>
+        <p:spPr>
+          <a:xfrm>
+            <a:off x="1714500" y="2"/>
+            <a:ext cx="0" cy="5786438"/>
+          </a:xfrm>
+          <a:prstGeom prst="line">
+            <a:avLst/>
+          </a:prstGeom>
+          <a:ln w="25400">
+            <a:solidFill>
+              <a:srgbClr val="7F7F7F"/>
+            </a:solidFill>
+          </a:ln>
+          <a:effectLst>
+            <a:outerShdw blurRad="50800" algn="ctr" rotWithShape="0">
+              <a:srgbClr val="7F7F7F"/>
+            </a:outerShdw>
+          </a:effectLst>
+        </p:spPr>
+        <p:style>
+          <a:lnRef idx="1">
+            <a:schemeClr val="accent1"/>
+          </a:lnRef>
+          <a:fillRef idx="0">
+            <a:schemeClr val="accent1"/>
+          </a:fillRef>
+          <a:effectRef idx="0">
+            <a:schemeClr val="accent1"/>
+          </a:effectRef>
+          <a:fontRef idx="minor">
+            <a:schemeClr val="tx1"/>
+          </a:fontRef>
+        </p:style>
+      </p:cxnSp>
+      <p:cxnSp>
+        <p:nvCxnSpPr>
+          <p:cNvPr id="37" name="직선 연결선 36">
+            <a:extLst>
+              <a:ext uri="{FF2B5EF4-FFF2-40B4-BE49-F238E27FC236}">
+                <a16:creationId xmlns:a16="http://schemas.microsoft.com/office/drawing/2014/main" id="{733AC387-77B3-AF35-B391-5A0D2FF19D51}"/>
+              </a:ext>
+            </a:extLst>
+          </p:cNvPr>
+          <p:cNvCxnSpPr/>
+          <p:nvPr/>
+        </p:nvCxnSpPr>
+        <p:spPr>
+          <a:xfrm>
+            <a:off x="2286000" y="2"/>
+            <a:ext cx="0" cy="5786438"/>
+          </a:xfrm>
+          <a:prstGeom prst="line">
+            <a:avLst/>
+          </a:prstGeom>
+          <a:ln w="25400">
+            <a:solidFill>
+              <a:srgbClr val="7F7F7F"/>
+            </a:solidFill>
+          </a:ln>
+          <a:effectLst>
+            <a:outerShdw blurRad="50800" algn="ctr" rotWithShape="0">
+              <a:srgbClr val="7F7F7F"/>
+            </a:outerShdw>
+          </a:effectLst>
+        </p:spPr>
+        <p:style>
+          <a:lnRef idx="1">
+            <a:schemeClr val="accent1"/>
+          </a:lnRef>
+          <a:fillRef idx="0">
+            <a:schemeClr val="accent1"/>
+          </a:fillRef>
+          <a:effectRef idx="0">
+            <a:schemeClr val="accent1"/>
+          </a:effectRef>
+          <a:fontRef idx="minor">
+            <a:schemeClr val="tx1"/>
+          </a:fontRef>
+        </p:style>
+      </p:cxnSp>
+      <p:cxnSp>
+        <p:nvCxnSpPr>
+          <p:cNvPr id="38" name="직선 연결선 37">
+            <a:extLst>
+              <a:ext uri="{FF2B5EF4-FFF2-40B4-BE49-F238E27FC236}">
+                <a16:creationId xmlns:a16="http://schemas.microsoft.com/office/drawing/2014/main" id="{37AE6EBF-F320-47AD-2DAC-B3EFC9960D82}"/>
+              </a:ext>
+            </a:extLst>
+          </p:cNvPr>
+          <p:cNvCxnSpPr/>
+          <p:nvPr/>
+        </p:nvCxnSpPr>
+        <p:spPr>
+          <a:xfrm>
+            <a:off x="2857500" y="1183"/>
+            <a:ext cx="0" cy="5786438"/>
+          </a:xfrm>
+          <a:prstGeom prst="line">
+            <a:avLst/>
+          </a:prstGeom>
+          <a:ln w="25400">
+            <a:solidFill>
+              <a:srgbClr val="7F7F7F"/>
+            </a:solidFill>
+          </a:ln>
+          <a:effectLst>
+            <a:outerShdw blurRad="50800" algn="ctr" rotWithShape="0">
+              <a:srgbClr val="7F7F7F"/>
+            </a:outerShdw>
+          </a:effectLst>
+        </p:spPr>
+        <p:style>
+          <a:lnRef idx="1">
+            <a:schemeClr val="accent1"/>
+          </a:lnRef>
+          <a:fillRef idx="0">
+            <a:schemeClr val="accent1"/>
+          </a:fillRef>
+          <a:effectRef idx="0">
+            <a:schemeClr val="accent1"/>
+          </a:effectRef>
+          <a:fontRef idx="minor">
+            <a:schemeClr val="tx1"/>
+          </a:fontRef>
+        </p:style>
+      </p:cxnSp>
+      <p:cxnSp>
+        <p:nvCxnSpPr>
+          <p:cNvPr id="39" name="직선 연결선 38">
+            <a:extLst>
+              <a:ext uri="{FF2B5EF4-FFF2-40B4-BE49-F238E27FC236}">
+                <a16:creationId xmlns:a16="http://schemas.microsoft.com/office/drawing/2014/main" id="{947BEA92-0C34-7496-2E9F-DE8D9C5B8E63}"/>
+              </a:ext>
+            </a:extLst>
+          </p:cNvPr>
+          <p:cNvCxnSpPr/>
+          <p:nvPr/>
+        </p:nvCxnSpPr>
+        <p:spPr>
+          <a:xfrm>
+            <a:off x="3429000" y="1183"/>
+            <a:ext cx="0" cy="5786438"/>
+          </a:xfrm>
+          <a:prstGeom prst="line">
+            <a:avLst/>
+          </a:prstGeom>
+          <a:ln w="25400">
+            <a:solidFill>
+              <a:srgbClr val="7F7F7F"/>
+            </a:solidFill>
+          </a:ln>
+          <a:effectLst>
+            <a:outerShdw blurRad="50800" algn="ctr" rotWithShape="0">
+              <a:srgbClr val="7F7F7F"/>
+            </a:outerShdw>
+          </a:effectLst>
+        </p:spPr>
+        <p:style>
+          <a:lnRef idx="1">
+            <a:schemeClr val="accent1"/>
+          </a:lnRef>
+          <a:fillRef idx="0">
+            <a:schemeClr val="accent1"/>
+          </a:fillRef>
+          <a:effectRef idx="0">
+            <a:schemeClr val="accent1"/>
+          </a:effectRef>
+          <a:fontRef idx="minor">
+            <a:schemeClr val="tx1"/>
+          </a:fontRef>
+        </p:style>
+      </p:cxnSp>
+      <p:cxnSp>
+        <p:nvCxnSpPr>
+          <p:cNvPr id="40" name="직선 연결선 39">
+            <a:extLst>
+              <a:ext uri="{FF2B5EF4-FFF2-40B4-BE49-F238E27FC236}">
+                <a16:creationId xmlns:a16="http://schemas.microsoft.com/office/drawing/2014/main" id="{E55BF752-8AC9-1E51-3AC9-9CD3B24890E9}"/>
+              </a:ext>
+            </a:extLst>
+          </p:cNvPr>
+          <p:cNvCxnSpPr/>
+          <p:nvPr/>
+        </p:nvCxnSpPr>
+        <p:spPr>
+          <a:xfrm>
+            <a:off x="4000500" y="1183"/>
+            <a:ext cx="0" cy="5786438"/>
+          </a:xfrm>
+          <a:prstGeom prst="line">
+            <a:avLst/>
+          </a:prstGeom>
+          <a:ln w="25400">
+            <a:solidFill>
+              <a:srgbClr val="7F7F7F"/>
+            </a:solidFill>
+          </a:ln>
+          <a:effectLst>
+            <a:outerShdw blurRad="50800" algn="ctr" rotWithShape="0">
+              <a:srgbClr val="7F7F7F"/>
+            </a:outerShdw>
+          </a:effectLst>
+        </p:spPr>
+        <p:style>
+          <a:lnRef idx="1">
+            <a:schemeClr val="accent1"/>
+          </a:lnRef>
+          <a:fillRef idx="0">
+            <a:schemeClr val="accent1"/>
+          </a:fillRef>
+          <a:effectRef idx="0">
+            <a:schemeClr val="accent1"/>
+          </a:effectRef>
+          <a:fontRef idx="minor">
+            <a:schemeClr val="tx1"/>
+          </a:fontRef>
+        </p:style>
+      </p:cxnSp>
+      <p:cxnSp>
+        <p:nvCxnSpPr>
+          <p:cNvPr id="41" name="직선 연결선 40">
+            <a:extLst>
+              <a:ext uri="{FF2B5EF4-FFF2-40B4-BE49-F238E27FC236}">
+                <a16:creationId xmlns:a16="http://schemas.microsoft.com/office/drawing/2014/main" id="{9E0159AA-D969-C7EA-91D4-6C5D7D365E85}"/>
+              </a:ext>
+            </a:extLst>
+          </p:cNvPr>
+          <p:cNvCxnSpPr/>
+          <p:nvPr/>
+        </p:nvCxnSpPr>
+        <p:spPr>
+          <a:xfrm>
+            <a:off x="4572000" y="1183"/>
+            <a:ext cx="0" cy="5786438"/>
+          </a:xfrm>
+          <a:prstGeom prst="line">
+            <a:avLst/>
+          </a:prstGeom>
+          <a:ln w="25400">
+            <a:solidFill>
+              <a:srgbClr val="7F7F7F"/>
+            </a:solidFill>
+          </a:ln>
+          <a:effectLst>
+            <a:outerShdw blurRad="50800" algn="ctr" rotWithShape="0">
+              <a:srgbClr val="7F7F7F"/>
+            </a:outerShdw>
+          </a:effectLst>
+        </p:spPr>
+        <p:style>
+          <a:lnRef idx="1">
+            <a:schemeClr val="accent1"/>
+          </a:lnRef>
+          <a:fillRef idx="0">
+            <a:schemeClr val="accent1"/>
+          </a:fillRef>
+          <a:effectRef idx="0">
+            <a:schemeClr val="accent1"/>
+          </a:effectRef>
+          <a:fontRef idx="minor">
+            <a:schemeClr val="tx1"/>
+          </a:fontRef>
+        </p:style>
+      </p:cxnSp>
+      <p:cxnSp>
+        <p:nvCxnSpPr>
+          <p:cNvPr id="42" name="직선 연결선 41">
+            <a:extLst>
+              <a:ext uri="{FF2B5EF4-FFF2-40B4-BE49-F238E27FC236}">
+                <a16:creationId xmlns:a16="http://schemas.microsoft.com/office/drawing/2014/main" id="{8D078347-5A3A-D42C-14BA-9E160935661E}"/>
+              </a:ext>
+            </a:extLst>
+          </p:cNvPr>
+          <p:cNvCxnSpPr/>
+          <p:nvPr/>
+        </p:nvCxnSpPr>
+        <p:spPr>
+          <a:xfrm>
+            <a:off x="5715000" y="2"/>
+            <a:ext cx="0" cy="5786438"/>
+          </a:xfrm>
+          <a:prstGeom prst="line">
+            <a:avLst/>
+          </a:prstGeom>
+          <a:ln w="25400">
+            <a:solidFill>
+              <a:srgbClr val="7F7F7F"/>
+            </a:solidFill>
+          </a:ln>
+          <a:effectLst>
+            <a:outerShdw blurRad="50800" algn="ctr" rotWithShape="0">
+              <a:srgbClr val="7F7F7F"/>
+            </a:outerShdw>
+          </a:effectLst>
+        </p:spPr>
+        <p:style>
+          <a:lnRef idx="1">
+            <a:schemeClr val="accent1"/>
+          </a:lnRef>
+          <a:fillRef idx="0">
+            <a:schemeClr val="accent1"/>
+          </a:fillRef>
+          <a:effectRef idx="0">
+            <a:schemeClr val="accent1"/>
+          </a:effectRef>
+          <a:fontRef idx="minor">
+            <a:schemeClr val="tx1"/>
+          </a:fontRef>
+        </p:style>
+      </p:cxnSp>
+      <p:cxnSp>
+        <p:nvCxnSpPr>
+          <p:cNvPr id="43" name="직선 연결선 42">
+            <a:extLst>
+              <a:ext uri="{FF2B5EF4-FFF2-40B4-BE49-F238E27FC236}">
+                <a16:creationId xmlns:a16="http://schemas.microsoft.com/office/drawing/2014/main" id="{B9AB431D-3E5A-AA42-4A05-8E4002F3B55A}"/>
+              </a:ext>
+            </a:extLst>
+          </p:cNvPr>
+          <p:cNvCxnSpPr/>
+          <p:nvPr/>
+        </p:nvCxnSpPr>
+        <p:spPr>
+          <a:xfrm>
+            <a:off x="6286500" y="2"/>
+            <a:ext cx="0" cy="5786438"/>
+          </a:xfrm>
+          <a:prstGeom prst="line">
+            <a:avLst/>
+          </a:prstGeom>
+          <a:ln w="25400">
+            <a:solidFill>
+              <a:srgbClr val="7F7F7F"/>
+            </a:solidFill>
+          </a:ln>
+          <a:effectLst>
+            <a:outerShdw blurRad="50800" algn="ctr" rotWithShape="0">
+              <a:srgbClr val="7F7F7F"/>
+            </a:outerShdw>
+          </a:effectLst>
+        </p:spPr>
+        <p:style>
+          <a:lnRef idx="1">
+            <a:schemeClr val="accent1"/>
+          </a:lnRef>
+          <a:fillRef idx="0">
+            <a:schemeClr val="accent1"/>
+          </a:fillRef>
+          <a:effectRef idx="0">
+            <a:schemeClr val="accent1"/>
+          </a:effectRef>
+          <a:fontRef idx="minor">
+            <a:schemeClr val="tx1"/>
+          </a:fontRef>
+        </p:style>
+      </p:cxnSp>
+      <p:cxnSp>
+        <p:nvCxnSpPr>
+          <p:cNvPr id="44" name="직선 연결선 43">
+            <a:extLst>
+              <a:ext uri="{FF2B5EF4-FFF2-40B4-BE49-F238E27FC236}">
+                <a16:creationId xmlns:a16="http://schemas.microsoft.com/office/drawing/2014/main" id="{1C3150EA-77AB-CF0A-B571-BF5B74AEF8A9}"/>
+              </a:ext>
+            </a:extLst>
+          </p:cNvPr>
+          <p:cNvCxnSpPr/>
+          <p:nvPr/>
+        </p:nvCxnSpPr>
+        <p:spPr>
+          <a:xfrm>
+            <a:off x="6858000" y="2"/>
+            <a:ext cx="0" cy="5786438"/>
+          </a:xfrm>
+          <a:prstGeom prst="line">
+            <a:avLst/>
+          </a:prstGeom>
+          <a:ln w="25400">
+            <a:solidFill>
+              <a:srgbClr val="7F7F7F"/>
+            </a:solidFill>
+          </a:ln>
+          <a:effectLst>
+            <a:outerShdw blurRad="50800" algn="ctr" rotWithShape="0">
+              <a:srgbClr val="7F7F7F"/>
+            </a:outerShdw>
+          </a:effectLst>
+        </p:spPr>
+        <p:style>
+          <a:lnRef idx="1">
+            <a:schemeClr val="accent1"/>
+          </a:lnRef>
+          <a:fillRef idx="0">
+            <a:schemeClr val="accent1"/>
+          </a:fillRef>
+          <a:effectRef idx="0">
+            <a:schemeClr val="accent1"/>
+          </a:effectRef>
+          <a:fontRef idx="minor">
+            <a:schemeClr val="tx1"/>
+          </a:fontRef>
+        </p:style>
+      </p:cxnSp>
+      <p:cxnSp>
+        <p:nvCxnSpPr>
+          <p:cNvPr id="45" name="직선 연결선 44">
+            <a:extLst>
+              <a:ext uri="{FF2B5EF4-FFF2-40B4-BE49-F238E27FC236}">
+                <a16:creationId xmlns:a16="http://schemas.microsoft.com/office/drawing/2014/main" id="{2EDE3286-036D-251F-09EB-A62F0EEB463B}"/>
+              </a:ext>
+            </a:extLst>
+          </p:cNvPr>
+          <p:cNvCxnSpPr/>
+          <p:nvPr/>
+        </p:nvCxnSpPr>
+        <p:spPr>
+          <a:xfrm>
+            <a:off x="7429500" y="2"/>
+            <a:ext cx="0" cy="5786438"/>
+          </a:xfrm>
+          <a:prstGeom prst="line">
+            <a:avLst/>
+          </a:prstGeom>
+          <a:ln w="25400">
+            <a:solidFill>
+              <a:srgbClr val="7F7F7F"/>
+            </a:solidFill>
+          </a:ln>
+          <a:effectLst>
+            <a:outerShdw blurRad="50800" algn="ctr" rotWithShape="0">
+              <a:srgbClr val="7F7F7F"/>
+            </a:outerShdw>
+          </a:effectLst>
+        </p:spPr>
+        <p:style>
+          <a:lnRef idx="1">
+            <a:schemeClr val="accent1"/>
+          </a:lnRef>
+          <a:fillRef idx="0">
+            <a:schemeClr val="accent1"/>
+          </a:fillRef>
+          <a:effectRef idx="0">
+            <a:schemeClr val="accent1"/>
+          </a:effectRef>
+          <a:fontRef idx="minor">
+            <a:schemeClr val="tx1"/>
+          </a:fontRef>
+        </p:style>
+      </p:cxnSp>
+      <p:cxnSp>
+        <p:nvCxnSpPr>
+          <p:cNvPr id="46" name="직선 연결선 45">
+            <a:extLst>
+              <a:ext uri="{FF2B5EF4-FFF2-40B4-BE49-F238E27FC236}">
+                <a16:creationId xmlns:a16="http://schemas.microsoft.com/office/drawing/2014/main" id="{055077C7-A925-BEFB-8C94-00590B3B269B}"/>
+              </a:ext>
+            </a:extLst>
+          </p:cNvPr>
+          <p:cNvCxnSpPr/>
+          <p:nvPr/>
+        </p:nvCxnSpPr>
+        <p:spPr>
+          <a:xfrm>
+            <a:off x="8001000" y="1183"/>
+            <a:ext cx="0" cy="5786438"/>
+          </a:xfrm>
+          <a:prstGeom prst="line">
+            <a:avLst/>
+          </a:prstGeom>
+          <a:ln w="25400">
+            <a:solidFill>
+              <a:srgbClr val="7F7F7F"/>
+            </a:solidFill>
+          </a:ln>
+          <a:effectLst>
+            <a:outerShdw blurRad="50800" algn="ctr" rotWithShape="0">
+              <a:srgbClr val="7F7F7F"/>
+            </a:outerShdw>
+          </a:effectLst>
+        </p:spPr>
+        <p:style>
+          <a:lnRef idx="1">
+            <a:schemeClr val="accent1"/>
+          </a:lnRef>
+          <a:fillRef idx="0">
+            <a:schemeClr val="accent1"/>
+          </a:fillRef>
+          <a:effectRef idx="0">
+            <a:schemeClr val="accent1"/>
+          </a:effectRef>
+          <a:fontRef idx="minor">
+            <a:schemeClr val="tx1"/>
+          </a:fontRef>
+        </p:style>
+      </p:cxnSp>
+      <p:cxnSp>
+        <p:nvCxnSpPr>
+          <p:cNvPr id="47" name="직선 연결선 46">
+            <a:extLst>
+              <a:ext uri="{FF2B5EF4-FFF2-40B4-BE49-F238E27FC236}">
+                <a16:creationId xmlns:a16="http://schemas.microsoft.com/office/drawing/2014/main" id="{937B9761-47D7-BD0F-A382-C8CA75BF6341}"/>
+              </a:ext>
+            </a:extLst>
+          </p:cNvPr>
+          <p:cNvCxnSpPr/>
+          <p:nvPr/>
+        </p:nvCxnSpPr>
+        <p:spPr>
+          <a:xfrm>
+            <a:off x="8572500" y="1183"/>
+            <a:ext cx="0" cy="5786438"/>
+          </a:xfrm>
+          <a:prstGeom prst="line">
+            <a:avLst/>
+          </a:prstGeom>
+          <a:ln w="25400">
+            <a:solidFill>
+              <a:srgbClr val="7F7F7F"/>
+            </a:solidFill>
+          </a:ln>
+          <a:effectLst>
+            <a:outerShdw blurRad="50800" algn="ctr" rotWithShape="0">
+              <a:srgbClr val="7F7F7F"/>
+            </a:outerShdw>
+          </a:effectLst>
+        </p:spPr>
+        <p:style>
+          <a:lnRef idx="1">
+            <a:schemeClr val="accent1"/>
+          </a:lnRef>
+          <a:fillRef idx="0">
+            <a:schemeClr val="accent1"/>
+          </a:fillRef>
+          <a:effectRef idx="0">
+            <a:schemeClr val="accent1"/>
+          </a:effectRef>
+          <a:fontRef idx="minor">
+            <a:schemeClr val="tx1"/>
+          </a:fontRef>
+        </p:style>
+      </p:cxnSp>
+      <p:cxnSp>
+        <p:nvCxnSpPr>
+          <p:cNvPr id="48" name="직선 연결선 47">
+            <a:extLst>
+              <a:ext uri="{FF2B5EF4-FFF2-40B4-BE49-F238E27FC236}">
+                <a16:creationId xmlns:a16="http://schemas.microsoft.com/office/drawing/2014/main" id="{C2ADFC01-9757-017F-0CE5-EEC5EEEF8FB2}"/>
+              </a:ext>
+            </a:extLst>
+          </p:cNvPr>
+          <p:cNvCxnSpPr/>
+          <p:nvPr/>
+        </p:nvCxnSpPr>
+        <p:spPr>
+          <a:xfrm>
+            <a:off x="9144000" y="1183"/>
+            <a:ext cx="0" cy="5786438"/>
+          </a:xfrm>
+          <a:prstGeom prst="line">
+            <a:avLst/>
+          </a:prstGeom>
+          <a:ln w="25400">
+            <a:solidFill>
+              <a:srgbClr val="7F7F7F"/>
+            </a:solidFill>
+          </a:ln>
+          <a:effectLst>
+            <a:outerShdw blurRad="50800" algn="ctr" rotWithShape="0">
+              <a:srgbClr val="7F7F7F"/>
+            </a:outerShdw>
+          </a:effectLst>
+        </p:spPr>
+        <p:style>
+          <a:lnRef idx="1">
+            <a:schemeClr val="accent1"/>
+          </a:lnRef>
+          <a:fillRef idx="0">
+            <a:schemeClr val="accent1"/>
+          </a:fillRef>
+          <a:effectRef idx="0">
+            <a:schemeClr val="accent1"/>
+          </a:effectRef>
+          <a:fontRef idx="minor">
+            <a:schemeClr val="tx1"/>
+          </a:fontRef>
+        </p:style>
+      </p:cxnSp>
+      <p:cxnSp>
+        <p:nvCxnSpPr>
+          <p:cNvPr id="49" name="직선 연결선 48">
+            <a:extLst>
+              <a:ext uri="{FF2B5EF4-FFF2-40B4-BE49-F238E27FC236}">
+                <a16:creationId xmlns:a16="http://schemas.microsoft.com/office/drawing/2014/main" id="{94524032-975F-9A5C-2CCD-CB3F9413FB93}"/>
+              </a:ext>
+            </a:extLst>
+          </p:cNvPr>
+          <p:cNvCxnSpPr/>
+          <p:nvPr/>
+        </p:nvCxnSpPr>
+        <p:spPr>
+          <a:xfrm>
+            <a:off x="9715500" y="1183"/>
+            <a:ext cx="0" cy="5786438"/>
+          </a:xfrm>
+          <a:prstGeom prst="line">
+            <a:avLst/>
+          </a:prstGeom>
+          <a:ln w="25400">
+            <a:solidFill>
+              <a:srgbClr val="7F7F7F"/>
+            </a:solidFill>
+          </a:ln>
+          <a:effectLst>
+            <a:outerShdw blurRad="50800" algn="ctr" rotWithShape="0">
+              <a:srgbClr val="7F7F7F"/>
+            </a:outerShdw>
+          </a:effectLst>
+        </p:spPr>
+        <p:style>
+          <a:lnRef idx="1">
+            <a:schemeClr val="accent1"/>
+          </a:lnRef>
+          <a:fillRef idx="0">
+            <a:schemeClr val="accent1"/>
+          </a:fillRef>
+          <a:effectRef idx="0">
+            <a:schemeClr val="accent1"/>
+          </a:effectRef>
+          <a:fontRef idx="minor">
+            <a:schemeClr val="tx1"/>
+          </a:fontRef>
+        </p:style>
+      </p:cxnSp>
+      <p:cxnSp>
+        <p:nvCxnSpPr>
+          <p:cNvPr id="50" name="직선 연결선 49">
+            <a:extLst>
+              <a:ext uri="{FF2B5EF4-FFF2-40B4-BE49-F238E27FC236}">
+                <a16:creationId xmlns:a16="http://schemas.microsoft.com/office/drawing/2014/main" id="{62FDB796-605B-89D7-A9A6-4B4EB1FC595F}"/>
+              </a:ext>
+            </a:extLst>
+          </p:cNvPr>
+          <p:cNvCxnSpPr/>
+          <p:nvPr/>
+        </p:nvCxnSpPr>
+        <p:spPr>
+          <a:xfrm>
+            <a:off x="0" y="571500"/>
+            <a:ext cx="10287000" cy="0"/>
+          </a:xfrm>
+          <a:prstGeom prst="line">
+            <a:avLst/>
+          </a:prstGeom>
+          <a:ln w="25400">
+            <a:solidFill>
+              <a:srgbClr val="7F7F7F"/>
+            </a:solidFill>
+          </a:ln>
+          <a:effectLst>
+            <a:outerShdw blurRad="50800" algn="ctr" rotWithShape="0">
+              <a:srgbClr val="7F7F7F"/>
+            </a:outerShdw>
+          </a:effectLst>
+        </p:spPr>
+        <p:style>
+          <a:lnRef idx="1">
+            <a:schemeClr val="accent1"/>
+          </a:lnRef>
+          <a:fillRef idx="0">
+            <a:schemeClr val="accent1"/>
+          </a:fillRef>
+          <a:effectRef idx="0">
+            <a:schemeClr val="accent1"/>
+          </a:effectRef>
+          <a:fontRef idx="minor">
+            <a:schemeClr val="tx1"/>
+          </a:fontRef>
+        </p:style>
+      </p:cxnSp>
+      <p:cxnSp>
+        <p:nvCxnSpPr>
+          <p:cNvPr id="51" name="직선 연결선 50">
+            <a:extLst>
+              <a:ext uri="{FF2B5EF4-FFF2-40B4-BE49-F238E27FC236}">
+                <a16:creationId xmlns:a16="http://schemas.microsoft.com/office/drawing/2014/main" id="{04D86664-4C98-58FD-C2A9-313BEACAF509}"/>
+              </a:ext>
+            </a:extLst>
+          </p:cNvPr>
+          <p:cNvCxnSpPr/>
+          <p:nvPr/>
+        </p:nvCxnSpPr>
+        <p:spPr>
+          <a:xfrm>
+            <a:off x="0" y="1143000"/>
+            <a:ext cx="10287000" cy="0"/>
+          </a:xfrm>
+          <a:prstGeom prst="line">
+            <a:avLst/>
+          </a:prstGeom>
+          <a:ln w="25400">
+            <a:solidFill>
+              <a:srgbClr val="7F7F7F"/>
+            </a:solidFill>
+          </a:ln>
+          <a:effectLst>
+            <a:outerShdw blurRad="50800" algn="ctr" rotWithShape="0">
+              <a:srgbClr val="7F7F7F"/>
+            </a:outerShdw>
+          </a:effectLst>
+        </p:spPr>
+        <p:style>
+          <a:lnRef idx="1">
+            <a:schemeClr val="accent1"/>
+          </a:lnRef>
+          <a:fillRef idx="0">
+            <a:schemeClr val="accent1"/>
+          </a:fillRef>
+          <a:effectRef idx="0">
+            <a:schemeClr val="accent1"/>
+          </a:effectRef>
+          <a:fontRef idx="minor">
+            <a:schemeClr val="tx1"/>
+          </a:fontRef>
+        </p:style>
+      </p:cxnSp>
+      <p:cxnSp>
+        <p:nvCxnSpPr>
+          <p:cNvPr id="52" name="직선 연결선 51">
+            <a:extLst>
+              <a:ext uri="{FF2B5EF4-FFF2-40B4-BE49-F238E27FC236}">
+                <a16:creationId xmlns:a16="http://schemas.microsoft.com/office/drawing/2014/main" id="{CE7C8BB2-20CB-FA0F-080A-F89EE7197CC5}"/>
+              </a:ext>
+            </a:extLst>
+          </p:cNvPr>
+          <p:cNvCxnSpPr/>
+          <p:nvPr/>
+        </p:nvCxnSpPr>
+        <p:spPr>
+          <a:xfrm>
+            <a:off x="0" y="1714500"/>
+            <a:ext cx="10287000" cy="0"/>
+          </a:xfrm>
+          <a:prstGeom prst="line">
+            <a:avLst/>
+          </a:prstGeom>
+          <a:ln w="25400">
+            <a:solidFill>
+              <a:srgbClr val="7F7F7F"/>
+            </a:solidFill>
+          </a:ln>
+          <a:effectLst>
+            <a:outerShdw blurRad="50800" algn="ctr" rotWithShape="0">
+              <a:srgbClr val="7F7F7F"/>
+            </a:outerShdw>
+          </a:effectLst>
+        </p:spPr>
+        <p:style>
+          <a:lnRef idx="1">
+            <a:schemeClr val="accent1"/>
+          </a:lnRef>
+          <a:fillRef idx="0">
+            <a:schemeClr val="accent1"/>
+          </a:fillRef>
+          <a:effectRef idx="0">
+            <a:schemeClr val="accent1"/>
+          </a:effectRef>
+          <a:fontRef idx="minor">
+            <a:schemeClr val="tx1"/>
+          </a:fontRef>
+        </p:style>
+      </p:cxnSp>
+      <p:cxnSp>
+        <p:nvCxnSpPr>
+          <p:cNvPr id="53" name="직선 연결선 52">
+            <a:extLst>
+              <a:ext uri="{FF2B5EF4-FFF2-40B4-BE49-F238E27FC236}">
+                <a16:creationId xmlns:a16="http://schemas.microsoft.com/office/drawing/2014/main" id="{ED3FFC0F-F62C-4122-B017-5098F62BD5A1}"/>
+              </a:ext>
+            </a:extLst>
+          </p:cNvPr>
+          <p:cNvCxnSpPr/>
+          <p:nvPr/>
+        </p:nvCxnSpPr>
+        <p:spPr>
+          <a:xfrm>
+            <a:off x="0" y="2286000"/>
+            <a:ext cx="10287000" cy="0"/>
+          </a:xfrm>
+          <a:prstGeom prst="line">
+            <a:avLst/>
+          </a:prstGeom>
+          <a:ln w="25400">
+            <a:solidFill>
+              <a:srgbClr val="7F7F7F"/>
+            </a:solidFill>
+          </a:ln>
+          <a:effectLst>
+            <a:outerShdw blurRad="50800" algn="ctr" rotWithShape="0">
+              <a:srgbClr val="7F7F7F"/>
+            </a:outerShdw>
+          </a:effectLst>
+        </p:spPr>
+        <p:style>
+          <a:lnRef idx="1">
+            <a:schemeClr val="accent1"/>
+          </a:lnRef>
+          <a:fillRef idx="0">
+            <a:schemeClr val="accent1"/>
+          </a:fillRef>
+          <a:effectRef idx="0">
+            <a:schemeClr val="accent1"/>
+          </a:effectRef>
+          <a:fontRef idx="minor">
+            <a:schemeClr val="tx1"/>
+          </a:fontRef>
+        </p:style>
+      </p:cxnSp>
+      <p:cxnSp>
+        <p:nvCxnSpPr>
+          <p:cNvPr id="54" name="직선 연결선 53">
+            <a:extLst>
+              <a:ext uri="{FF2B5EF4-FFF2-40B4-BE49-F238E27FC236}">
+                <a16:creationId xmlns:a16="http://schemas.microsoft.com/office/drawing/2014/main" id="{E18E7E87-E28E-D77D-4134-0FF7A9810E05}"/>
+              </a:ext>
+            </a:extLst>
+          </p:cNvPr>
+          <p:cNvCxnSpPr/>
+          <p:nvPr/>
+        </p:nvCxnSpPr>
+        <p:spPr>
+          <a:xfrm>
+            <a:off x="0" y="3429000"/>
+            <a:ext cx="10287000" cy="0"/>
+          </a:xfrm>
+          <a:prstGeom prst="line">
+            <a:avLst/>
+          </a:prstGeom>
+          <a:ln w="25400">
+            <a:solidFill>
+              <a:srgbClr val="7F7F7F"/>
+            </a:solidFill>
+          </a:ln>
+          <a:effectLst>
+            <a:outerShdw blurRad="50800" algn="ctr" rotWithShape="0">
+              <a:srgbClr val="7F7F7F"/>
+            </a:outerShdw>
+          </a:effectLst>
+        </p:spPr>
+        <p:style>
+          <a:lnRef idx="1">
+            <a:schemeClr val="accent1"/>
+          </a:lnRef>
+          <a:fillRef idx="0">
+            <a:schemeClr val="accent1"/>
+          </a:fillRef>
+          <a:effectRef idx="0">
+            <a:schemeClr val="accent1"/>
+          </a:effectRef>
+          <a:fontRef idx="minor">
+            <a:schemeClr val="tx1"/>
+          </a:fontRef>
+        </p:style>
+      </p:cxnSp>
+      <p:cxnSp>
+        <p:nvCxnSpPr>
+          <p:cNvPr id="55" name="직선 연결선 54">
+            <a:extLst>
+              <a:ext uri="{FF2B5EF4-FFF2-40B4-BE49-F238E27FC236}">
+                <a16:creationId xmlns:a16="http://schemas.microsoft.com/office/drawing/2014/main" id="{FB8CB08C-683A-0F91-8F8F-57F081E2416A}"/>
+              </a:ext>
+            </a:extLst>
+          </p:cNvPr>
+          <p:cNvCxnSpPr/>
+          <p:nvPr/>
+        </p:nvCxnSpPr>
+        <p:spPr>
+          <a:xfrm>
+            <a:off x="0" y="4000500"/>
+            <a:ext cx="10287000" cy="0"/>
+          </a:xfrm>
+          <a:prstGeom prst="line">
+            <a:avLst/>
+          </a:prstGeom>
+          <a:ln w="25400">
+            <a:solidFill>
+              <a:srgbClr val="7F7F7F"/>
+            </a:solidFill>
+          </a:ln>
+          <a:effectLst>
+            <a:outerShdw blurRad="50800" algn="ctr" rotWithShape="0">
+              <a:srgbClr val="7F7F7F"/>
+            </a:outerShdw>
+          </a:effectLst>
+        </p:spPr>
+        <p:style>
+          <a:lnRef idx="1">
+            <a:schemeClr val="accent1"/>
+          </a:lnRef>
+          <a:fillRef idx="0">
+            <a:schemeClr val="accent1"/>
+          </a:fillRef>
+          <a:effectRef idx="0">
+            <a:schemeClr val="accent1"/>
+          </a:effectRef>
+          <a:fontRef idx="minor">
+            <a:schemeClr val="tx1"/>
+          </a:fontRef>
+        </p:style>
+      </p:cxnSp>
+      <p:cxnSp>
+        <p:nvCxnSpPr>
+          <p:cNvPr id="56" name="직선 연결선 55">
+            <a:extLst>
+              <a:ext uri="{FF2B5EF4-FFF2-40B4-BE49-F238E27FC236}">
+                <a16:creationId xmlns:a16="http://schemas.microsoft.com/office/drawing/2014/main" id="{258E4661-6504-2E35-0223-E420559E61C0}"/>
+              </a:ext>
+            </a:extLst>
+          </p:cNvPr>
+          <p:cNvCxnSpPr/>
+          <p:nvPr/>
+        </p:nvCxnSpPr>
+        <p:spPr>
+          <a:xfrm>
+            <a:off x="0" y="4572000"/>
+            <a:ext cx="10287000" cy="0"/>
+          </a:xfrm>
+          <a:prstGeom prst="line">
+            <a:avLst/>
+          </a:prstGeom>
+          <a:ln w="25400">
+            <a:solidFill>
+              <a:srgbClr val="7F7F7F"/>
+            </a:solidFill>
+          </a:ln>
+          <a:effectLst>
+            <a:outerShdw blurRad="50800" algn="ctr" rotWithShape="0">
+              <a:srgbClr val="7F7F7F"/>
+            </a:outerShdw>
+          </a:effectLst>
+        </p:spPr>
+        <p:style>
+          <a:lnRef idx="1">
+            <a:schemeClr val="accent1"/>
+          </a:lnRef>
+          <a:fillRef idx="0">
+            <a:schemeClr val="accent1"/>
+          </a:fillRef>
+          <a:effectRef idx="0">
+            <a:schemeClr val="accent1"/>
+          </a:effectRef>
+          <a:fontRef idx="minor">
+            <a:schemeClr val="tx1"/>
+          </a:fontRef>
+        </p:style>
+      </p:cxnSp>
+      <p:cxnSp>
+        <p:nvCxnSpPr>
+          <p:cNvPr id="57" name="직선 연결선 56">
+            <a:extLst>
+              <a:ext uri="{FF2B5EF4-FFF2-40B4-BE49-F238E27FC236}">
+                <a16:creationId xmlns:a16="http://schemas.microsoft.com/office/drawing/2014/main" id="{C7959C3F-76ED-5E47-9E77-1182C7510180}"/>
+              </a:ext>
+            </a:extLst>
+          </p:cNvPr>
+          <p:cNvCxnSpPr/>
+          <p:nvPr/>
+        </p:nvCxnSpPr>
+        <p:spPr>
+          <a:xfrm>
+            <a:off x="0" y="5143500"/>
+            <a:ext cx="10287000" cy="0"/>
+          </a:xfrm>
+          <a:prstGeom prst="line">
+            <a:avLst/>
+          </a:prstGeom>
+          <a:ln w="25400">
+            <a:solidFill>
+              <a:srgbClr val="7F7F7F"/>
+            </a:solidFill>
+          </a:ln>
+          <a:effectLst>
+            <a:outerShdw blurRad="50800" algn="ctr" rotWithShape="0">
+              <a:srgbClr val="7F7F7F"/>
+            </a:outerShdw>
+          </a:effectLst>
+        </p:spPr>
+        <p:style>
+          <a:lnRef idx="1">
+            <a:schemeClr val="accent1"/>
+          </a:lnRef>
+          <a:fillRef idx="0">
+            <a:schemeClr val="accent1"/>
+          </a:fillRef>
+          <a:effectRef idx="0">
+            <a:schemeClr val="accent1"/>
+          </a:effectRef>
+          <a:fontRef idx="minor">
+            <a:schemeClr val="tx1"/>
+          </a:fontRef>
+        </p:style>
+      </p:cxnSp>
+      <p:cxnSp>
+        <p:nvCxnSpPr>
+          <p:cNvPr id="61" name="직선 연결선 60">
+            <a:extLst>
+              <a:ext uri="{FF2B5EF4-FFF2-40B4-BE49-F238E27FC236}">
+                <a16:creationId xmlns:a16="http://schemas.microsoft.com/office/drawing/2014/main" id="{E153EEF7-0B81-114B-F751-4E19DF094749}"/>
+              </a:ext>
+            </a:extLst>
+          </p:cNvPr>
+          <p:cNvCxnSpPr/>
+          <p:nvPr/>
+        </p:nvCxnSpPr>
+        <p:spPr>
+          <a:xfrm>
+            <a:off x="0" y="2858400"/>
+            <a:ext cx="10287000" cy="0"/>
+          </a:xfrm>
+          <a:prstGeom prst="line">
+            <a:avLst/>
+          </a:prstGeom>
+          <a:ln w="25400">
+            <a:solidFill>
+              <a:srgbClr val="7F7F7F"/>
+            </a:solidFill>
+          </a:ln>
+          <a:effectLst>
+            <a:outerShdw blurRad="50800" algn="ctr" rotWithShape="0">
+              <a:srgbClr val="7F7F7F"/>
+            </a:outerShdw>
+          </a:effectLst>
+        </p:spPr>
+        <p:style>
+          <a:lnRef idx="1">
+            <a:schemeClr val="accent1"/>
+          </a:lnRef>
+          <a:fillRef idx="0">
+            <a:schemeClr val="accent1"/>
+          </a:fillRef>
+          <a:effectRef idx="0">
+            <a:schemeClr val="accent1"/>
+          </a:effectRef>
+          <a:fontRef idx="minor">
+            <a:schemeClr val="tx1"/>
+          </a:fontRef>
+        </p:style>
+      </p:cxnSp>
+      <p:cxnSp>
+        <p:nvCxnSpPr>
+          <p:cNvPr id="62" name="직선 연결선 61">
+            <a:extLst>
+              <a:ext uri="{FF2B5EF4-FFF2-40B4-BE49-F238E27FC236}">
+                <a16:creationId xmlns:a16="http://schemas.microsoft.com/office/drawing/2014/main" id="{28EB7759-5403-70F0-B020-72F45B2EAF38}"/>
+              </a:ext>
+            </a:extLst>
+          </p:cNvPr>
+          <p:cNvCxnSpPr/>
+          <p:nvPr/>
+        </p:nvCxnSpPr>
+        <p:spPr>
+          <a:xfrm>
+            <a:off x="5144400" y="0"/>
+            <a:ext cx="0" cy="5786438"/>
+          </a:xfrm>
+          <a:prstGeom prst="line">
+            <a:avLst/>
+          </a:prstGeom>
+          <a:ln w="25400">
+            <a:solidFill>
+              <a:srgbClr val="7F7F7F"/>
+            </a:solidFill>
+          </a:ln>
+          <a:effectLst>
+            <a:outerShdw blurRad="50800" algn="ctr" rotWithShape="0">
+              <a:srgbClr val="7F7F7F"/>
+            </a:outerShdw>
+          </a:effectLst>
+        </p:spPr>
+        <p:style>
+          <a:lnRef idx="1">
+            <a:schemeClr val="accent1"/>
+          </a:lnRef>
+          <a:fillRef idx="0">
+            <a:schemeClr val="accent1"/>
+          </a:fillRef>
+          <a:effectRef idx="0">
+            <a:schemeClr val="accent1"/>
+          </a:effectRef>
+          <a:fontRef idx="minor">
+            <a:schemeClr val="tx1"/>
+          </a:fontRef>
+        </p:style>
+      </p:cxnSp>
+    </p:spTree>
+    <p:extLst>
+      <p:ext uri="{BB962C8B-B14F-4D97-AF65-F5344CB8AC3E}">
+        <p14:creationId xmlns:p14="http://schemas.microsoft.com/office/powerpoint/2010/main" val="2977310560"/>
       </p:ext>
     </p:extLst>
   </p:cSld>
